--- a/HPC final project.pptx
+++ b/HPC final project.pptx
@@ -4,10 +4,21 @@
   <p:sldMasterIdLst>
     <p:sldMasterId id="2147483648" r:id="rId1"/>
   </p:sldMasterIdLst>
+  <p:notesMasterIdLst>
+    <p:notesMasterId r:id="rId13"/>
+  </p:notesMasterIdLst>
   <p:sldIdLst>
     <p:sldId id="256" r:id="rId2"/>
     <p:sldId id="257" r:id="rId3"/>
     <p:sldId id="258" r:id="rId4"/>
+    <p:sldId id="259" r:id="rId5"/>
+    <p:sldId id="260" r:id="rId6"/>
+    <p:sldId id="261" r:id="rId7"/>
+    <p:sldId id="262" r:id="rId8"/>
+    <p:sldId id="263" r:id="rId9"/>
+    <p:sldId id="264" r:id="rId10"/>
+    <p:sldId id="265" r:id="rId11"/>
+    <p:sldId id="266" r:id="rId12"/>
   </p:sldIdLst>
   <p:sldSz cx="12192000" cy="6858000"/>
   <p:notesSz cx="6858000" cy="9144000"/>
@@ -106,7 +117,362 @@
       </a:defRPr>
     </a:lvl9pPr>
   </p:defaultTextStyle>
+  <p:extLst>
+    <p:ext uri="{EFAFB233-063F-42B5-8137-9DF3F51BA10A}">
+      <p15:sldGuideLst xmlns:p15="http://schemas.microsoft.com/office/powerpoint/2012/main"/>
+    </p:ext>
+  </p:extLst>
 </p:presentation>
+</file>
+
+<file path=ppt/notesMasters/notesMaster1.xml><?xml version="1.0" encoding="utf-8"?>
+<p:notesMaster xmlns:a="http://schemas.openxmlformats.org/drawingml/2006/main" xmlns:r="http://schemas.openxmlformats.org/officeDocument/2006/relationships" xmlns:p="http://schemas.openxmlformats.org/presentationml/2006/main">
+  <p:cSld>
+    <p:bg>
+      <p:bgRef idx="1001">
+        <a:schemeClr val="bg1"/>
+      </p:bgRef>
+    </p:bg>
+    <p:spTree>
+      <p:nvGrpSpPr>
+        <p:cNvPr id="1" name=""/>
+        <p:cNvGrpSpPr/>
+        <p:nvPr/>
+      </p:nvGrpSpPr>
+      <p:grpSpPr>
+        <a:xfrm>
+          <a:off x="0" y="0"/>
+          <a:ext cx="0" cy="0"/>
+          <a:chOff x="0" y="0"/>
+          <a:chExt cx="0" cy="0"/>
+        </a:xfrm>
+      </p:grpSpPr>
+      <p:sp>
+        <p:nvSpPr>
+          <p:cNvPr id="2" name="Segnaposto intestazione 1"/>
+          <p:cNvSpPr>
+            <a:spLocks noGrp="1"/>
+          </p:cNvSpPr>
+          <p:nvPr>
+            <p:ph type="hdr" sz="quarter"/>
+          </p:nvPr>
+        </p:nvSpPr>
+        <p:spPr>
+          <a:xfrm>
+            <a:off x="0" y="0"/>
+            <a:ext cx="2971800" cy="458788"/>
+          </a:xfrm>
+          <a:prstGeom prst="rect">
+            <a:avLst/>
+          </a:prstGeom>
+        </p:spPr>
+        <p:txBody>
+          <a:bodyPr vert="horz" lIns="91440" tIns="45720" rIns="91440" bIns="45720" rtlCol="0"/>
+          <a:lstStyle>
+            <a:lvl1pPr algn="l">
+              <a:defRPr sz="1200"/>
+            </a:lvl1pPr>
+          </a:lstStyle>
+          <a:p>
+            <a:endParaRPr lang="en-GB"/>
+          </a:p>
+        </p:txBody>
+      </p:sp>
+      <p:sp>
+        <p:nvSpPr>
+          <p:cNvPr id="3" name="Segnaposto data 2"/>
+          <p:cNvSpPr>
+            <a:spLocks noGrp="1"/>
+          </p:cNvSpPr>
+          <p:nvPr>
+            <p:ph type="dt" idx="1"/>
+          </p:nvPr>
+        </p:nvSpPr>
+        <p:spPr>
+          <a:xfrm>
+            <a:off x="3884613" y="0"/>
+            <a:ext cx="2971800" cy="458788"/>
+          </a:xfrm>
+          <a:prstGeom prst="rect">
+            <a:avLst/>
+          </a:prstGeom>
+        </p:spPr>
+        <p:txBody>
+          <a:bodyPr vert="horz" lIns="91440" tIns="45720" rIns="91440" bIns="45720" rtlCol="0"/>
+          <a:lstStyle>
+            <a:lvl1pPr algn="r">
+              <a:defRPr sz="1200"/>
+            </a:lvl1pPr>
+          </a:lstStyle>
+          <a:p>
+            <a:fld id="{8821C431-9A8C-4AAF-B8EF-9280E0C5E213}" type="datetimeFigureOut">
+              <a:rPr lang="en-GB" smtClean="0"/>
+              <a:t>28/02/2026</a:t>
+            </a:fld>
+            <a:endParaRPr lang="en-GB"/>
+          </a:p>
+        </p:txBody>
+      </p:sp>
+      <p:sp>
+        <p:nvSpPr>
+          <p:cNvPr id="4" name="Segnaposto immagine diapositiva 3"/>
+          <p:cNvSpPr>
+            <a:spLocks noGrp="1" noRot="1" noChangeAspect="1"/>
+          </p:cNvSpPr>
+          <p:nvPr>
+            <p:ph type="sldImg" idx="2"/>
+          </p:nvPr>
+        </p:nvSpPr>
+        <p:spPr>
+          <a:xfrm>
+            <a:off x="685800" y="1143000"/>
+            <a:ext cx="5486400" cy="3086100"/>
+          </a:xfrm>
+          <a:prstGeom prst="rect">
+            <a:avLst/>
+          </a:prstGeom>
+          <a:noFill/>
+          <a:ln w="12700">
+            <a:solidFill>
+              <a:prstClr val="black"/>
+            </a:solidFill>
+          </a:ln>
+        </p:spPr>
+        <p:txBody>
+          <a:bodyPr vert="horz" lIns="91440" tIns="45720" rIns="91440" bIns="45720" rtlCol="0" anchor="ctr"/>
+          <a:lstStyle/>
+          <a:p>
+            <a:endParaRPr lang="en-GB"/>
+          </a:p>
+        </p:txBody>
+      </p:sp>
+      <p:sp>
+        <p:nvSpPr>
+          <p:cNvPr id="5" name="Segnaposto note 4"/>
+          <p:cNvSpPr>
+            <a:spLocks noGrp="1"/>
+          </p:cNvSpPr>
+          <p:nvPr>
+            <p:ph type="body" sz="quarter" idx="3"/>
+          </p:nvPr>
+        </p:nvSpPr>
+        <p:spPr>
+          <a:xfrm>
+            <a:off x="685800" y="4400550"/>
+            <a:ext cx="5486400" cy="3600450"/>
+          </a:xfrm>
+          <a:prstGeom prst="rect">
+            <a:avLst/>
+          </a:prstGeom>
+        </p:spPr>
+        <p:txBody>
+          <a:bodyPr vert="horz" lIns="91440" tIns="45720" rIns="91440" bIns="45720" rtlCol="0"/>
+          <a:lstStyle/>
+          <a:p>
+            <a:pPr lvl="0"/>
+            <a:r>
+              <a:rPr lang="it-IT"/>
+              <a:t>Fare clic per modificare gli stili del testo dello schema</a:t>
+            </a:r>
+          </a:p>
+          <a:p>
+            <a:pPr lvl="1"/>
+            <a:r>
+              <a:rPr lang="it-IT"/>
+              <a:t>Secondo livello</a:t>
+            </a:r>
+          </a:p>
+          <a:p>
+            <a:pPr lvl="2"/>
+            <a:r>
+              <a:rPr lang="it-IT"/>
+              <a:t>Terzo livello</a:t>
+            </a:r>
+          </a:p>
+          <a:p>
+            <a:pPr lvl="3"/>
+            <a:r>
+              <a:rPr lang="it-IT"/>
+              <a:t>Quarto livello</a:t>
+            </a:r>
+          </a:p>
+          <a:p>
+            <a:pPr lvl="4"/>
+            <a:r>
+              <a:rPr lang="it-IT"/>
+              <a:t>Quinto livello</a:t>
+            </a:r>
+            <a:endParaRPr lang="en-GB"/>
+          </a:p>
+        </p:txBody>
+      </p:sp>
+      <p:sp>
+        <p:nvSpPr>
+          <p:cNvPr id="6" name="Segnaposto piè di pagina 5"/>
+          <p:cNvSpPr>
+            <a:spLocks noGrp="1"/>
+          </p:cNvSpPr>
+          <p:nvPr>
+            <p:ph type="ftr" sz="quarter" idx="4"/>
+          </p:nvPr>
+        </p:nvSpPr>
+        <p:spPr>
+          <a:xfrm>
+            <a:off x="0" y="8685213"/>
+            <a:ext cx="2971800" cy="458787"/>
+          </a:xfrm>
+          <a:prstGeom prst="rect">
+            <a:avLst/>
+          </a:prstGeom>
+        </p:spPr>
+        <p:txBody>
+          <a:bodyPr vert="horz" lIns="91440" tIns="45720" rIns="91440" bIns="45720" rtlCol="0" anchor="b"/>
+          <a:lstStyle>
+            <a:lvl1pPr algn="l">
+              <a:defRPr sz="1200"/>
+            </a:lvl1pPr>
+          </a:lstStyle>
+          <a:p>
+            <a:endParaRPr lang="en-GB"/>
+          </a:p>
+        </p:txBody>
+      </p:sp>
+      <p:sp>
+        <p:nvSpPr>
+          <p:cNvPr id="7" name="Segnaposto numero diapositiva 6"/>
+          <p:cNvSpPr>
+            <a:spLocks noGrp="1"/>
+          </p:cNvSpPr>
+          <p:nvPr>
+            <p:ph type="sldNum" sz="quarter" idx="5"/>
+          </p:nvPr>
+        </p:nvSpPr>
+        <p:spPr>
+          <a:xfrm>
+            <a:off x="3884613" y="8685213"/>
+            <a:ext cx="2971800" cy="458787"/>
+          </a:xfrm>
+          <a:prstGeom prst="rect">
+            <a:avLst/>
+          </a:prstGeom>
+        </p:spPr>
+        <p:txBody>
+          <a:bodyPr vert="horz" lIns="91440" tIns="45720" rIns="91440" bIns="45720" rtlCol="0" anchor="b"/>
+          <a:lstStyle>
+            <a:lvl1pPr algn="r">
+              <a:defRPr sz="1200"/>
+            </a:lvl1pPr>
+          </a:lstStyle>
+          <a:p>
+            <a:fld id="{9549CC8B-C02B-48A3-971B-0AFD07128817}" type="slidenum">
+              <a:rPr lang="en-GB" smtClean="0"/>
+              <a:t>‹N›</a:t>
+            </a:fld>
+            <a:endParaRPr lang="en-GB"/>
+          </a:p>
+        </p:txBody>
+      </p:sp>
+    </p:spTree>
+    <p:extLst>
+      <p:ext uri="{BB962C8B-B14F-4D97-AF65-F5344CB8AC3E}">
+        <p14:creationId xmlns:p14="http://schemas.microsoft.com/office/powerpoint/2010/main" val="1174550460"/>
+      </p:ext>
+    </p:extLst>
+  </p:cSld>
+  <p:clrMap bg1="lt1" tx1="dk1" bg2="lt2" tx2="dk2" accent1="accent1" accent2="accent2" accent3="accent3" accent4="accent4" accent5="accent5" accent6="accent6" hlink="hlink" folHlink="folHlink"/>
+  <p:notesStyle>
+    <a:lvl1pPr marL="0" algn="l" defTabSz="914400" rtl="0" eaLnBrk="1" latinLnBrk="0" hangingPunct="1">
+      <a:defRPr sz="1200" kern="1200">
+        <a:solidFill>
+          <a:schemeClr val="tx1"/>
+        </a:solidFill>
+        <a:latin typeface="+mn-lt"/>
+        <a:ea typeface="+mn-ea"/>
+        <a:cs typeface="+mn-cs"/>
+      </a:defRPr>
+    </a:lvl1pPr>
+    <a:lvl2pPr marL="457200" algn="l" defTabSz="914400" rtl="0" eaLnBrk="1" latinLnBrk="0" hangingPunct="1">
+      <a:defRPr sz="1200" kern="1200">
+        <a:solidFill>
+          <a:schemeClr val="tx1"/>
+        </a:solidFill>
+        <a:latin typeface="+mn-lt"/>
+        <a:ea typeface="+mn-ea"/>
+        <a:cs typeface="+mn-cs"/>
+      </a:defRPr>
+    </a:lvl2pPr>
+    <a:lvl3pPr marL="914400" algn="l" defTabSz="914400" rtl="0" eaLnBrk="1" latinLnBrk="0" hangingPunct="1">
+      <a:defRPr sz="1200" kern="1200">
+        <a:solidFill>
+          <a:schemeClr val="tx1"/>
+        </a:solidFill>
+        <a:latin typeface="+mn-lt"/>
+        <a:ea typeface="+mn-ea"/>
+        <a:cs typeface="+mn-cs"/>
+      </a:defRPr>
+    </a:lvl3pPr>
+    <a:lvl4pPr marL="1371600" algn="l" defTabSz="914400" rtl="0" eaLnBrk="1" latinLnBrk="0" hangingPunct="1">
+      <a:defRPr sz="1200" kern="1200">
+        <a:solidFill>
+          <a:schemeClr val="tx1"/>
+        </a:solidFill>
+        <a:latin typeface="+mn-lt"/>
+        <a:ea typeface="+mn-ea"/>
+        <a:cs typeface="+mn-cs"/>
+      </a:defRPr>
+    </a:lvl4pPr>
+    <a:lvl5pPr marL="1828800" algn="l" defTabSz="914400" rtl="0" eaLnBrk="1" latinLnBrk="0" hangingPunct="1">
+      <a:defRPr sz="1200" kern="1200">
+        <a:solidFill>
+          <a:schemeClr val="tx1"/>
+        </a:solidFill>
+        <a:latin typeface="+mn-lt"/>
+        <a:ea typeface="+mn-ea"/>
+        <a:cs typeface="+mn-cs"/>
+      </a:defRPr>
+    </a:lvl5pPr>
+    <a:lvl6pPr marL="2286000" algn="l" defTabSz="914400" rtl="0" eaLnBrk="1" latinLnBrk="0" hangingPunct="1">
+      <a:defRPr sz="1200" kern="1200">
+        <a:solidFill>
+          <a:schemeClr val="tx1"/>
+        </a:solidFill>
+        <a:latin typeface="+mn-lt"/>
+        <a:ea typeface="+mn-ea"/>
+        <a:cs typeface="+mn-cs"/>
+      </a:defRPr>
+    </a:lvl6pPr>
+    <a:lvl7pPr marL="2743200" algn="l" defTabSz="914400" rtl="0" eaLnBrk="1" latinLnBrk="0" hangingPunct="1">
+      <a:defRPr sz="1200" kern="1200">
+        <a:solidFill>
+          <a:schemeClr val="tx1"/>
+        </a:solidFill>
+        <a:latin typeface="+mn-lt"/>
+        <a:ea typeface="+mn-ea"/>
+        <a:cs typeface="+mn-cs"/>
+      </a:defRPr>
+    </a:lvl7pPr>
+    <a:lvl8pPr marL="3200400" algn="l" defTabSz="914400" rtl="0" eaLnBrk="1" latinLnBrk="0" hangingPunct="1">
+      <a:defRPr sz="1200" kern="1200">
+        <a:solidFill>
+          <a:schemeClr val="tx1"/>
+        </a:solidFill>
+        <a:latin typeface="+mn-lt"/>
+        <a:ea typeface="+mn-ea"/>
+        <a:cs typeface="+mn-cs"/>
+      </a:defRPr>
+    </a:lvl8pPr>
+    <a:lvl9pPr marL="3657600" algn="l" defTabSz="914400" rtl="0" eaLnBrk="1" latinLnBrk="0" hangingPunct="1">
+      <a:defRPr sz="1200" kern="1200">
+        <a:solidFill>
+          <a:schemeClr val="tx1"/>
+        </a:solidFill>
+        <a:latin typeface="+mn-lt"/>
+        <a:ea typeface="+mn-ea"/>
+        <a:cs typeface="+mn-cs"/>
+      </a:defRPr>
+    </a:lvl9pPr>
+  </p:notesStyle>
+</p:notesMaster>
 </file>
 
 <file path=ppt/slideLayouts/slideLayout1.xml><?xml version="1.0" encoding="utf-8"?>
@@ -258,7 +624,7 @@
           <a:p>
             <a:fld id="{203DE63F-52CA-457A-9BA3-B26F08945099}" type="datetimeFigureOut">
               <a:rPr lang="en-GB" smtClean="0"/>
-              <a:t>27/02/2026</a:t>
+              <a:t>28/02/2026</a:t>
             </a:fld>
             <a:endParaRPr lang="en-GB"/>
           </a:p>
@@ -458,7 +824,7 @@
           <a:p>
             <a:fld id="{203DE63F-52CA-457A-9BA3-B26F08945099}" type="datetimeFigureOut">
               <a:rPr lang="en-GB" smtClean="0"/>
-              <a:t>27/02/2026</a:t>
+              <a:t>28/02/2026</a:t>
             </a:fld>
             <a:endParaRPr lang="en-GB"/>
           </a:p>
@@ -668,7 +1034,7 @@
           <a:p>
             <a:fld id="{203DE63F-52CA-457A-9BA3-B26F08945099}" type="datetimeFigureOut">
               <a:rPr lang="en-GB" smtClean="0"/>
-              <a:t>27/02/2026</a:t>
+              <a:t>28/02/2026</a:t>
             </a:fld>
             <a:endParaRPr lang="en-GB"/>
           </a:p>
@@ -868,7 +1234,7 @@
           <a:p>
             <a:fld id="{203DE63F-52CA-457A-9BA3-B26F08945099}" type="datetimeFigureOut">
               <a:rPr lang="en-GB" smtClean="0"/>
-              <a:t>27/02/2026</a:t>
+              <a:t>28/02/2026</a:t>
             </a:fld>
             <a:endParaRPr lang="en-GB"/>
           </a:p>
@@ -1144,7 +1510,7 @@
           <a:p>
             <a:fld id="{203DE63F-52CA-457A-9BA3-B26F08945099}" type="datetimeFigureOut">
               <a:rPr lang="en-GB" smtClean="0"/>
-              <a:t>27/02/2026</a:t>
+              <a:t>28/02/2026</a:t>
             </a:fld>
             <a:endParaRPr lang="en-GB"/>
           </a:p>
@@ -1412,7 +1778,7 @@
           <a:p>
             <a:fld id="{203DE63F-52CA-457A-9BA3-B26F08945099}" type="datetimeFigureOut">
               <a:rPr lang="en-GB" smtClean="0"/>
-              <a:t>27/02/2026</a:t>
+              <a:t>28/02/2026</a:t>
             </a:fld>
             <a:endParaRPr lang="en-GB"/>
           </a:p>
@@ -1827,7 +2193,7 @@
           <a:p>
             <a:fld id="{203DE63F-52CA-457A-9BA3-B26F08945099}" type="datetimeFigureOut">
               <a:rPr lang="en-GB" smtClean="0"/>
-              <a:t>27/02/2026</a:t>
+              <a:t>28/02/2026</a:t>
             </a:fld>
             <a:endParaRPr lang="en-GB"/>
           </a:p>
@@ -1969,7 +2335,7 @@
           <a:p>
             <a:fld id="{203DE63F-52CA-457A-9BA3-B26F08945099}" type="datetimeFigureOut">
               <a:rPr lang="en-GB" smtClean="0"/>
-              <a:t>27/02/2026</a:t>
+              <a:t>28/02/2026</a:t>
             </a:fld>
             <a:endParaRPr lang="en-GB"/>
           </a:p>
@@ -2082,7 +2448,7 @@
           <a:p>
             <a:fld id="{203DE63F-52CA-457A-9BA3-B26F08945099}" type="datetimeFigureOut">
               <a:rPr lang="en-GB" smtClean="0"/>
-              <a:t>27/02/2026</a:t>
+              <a:t>28/02/2026</a:t>
             </a:fld>
             <a:endParaRPr lang="en-GB"/>
           </a:p>
@@ -2395,7 +2761,7 @@
           <a:p>
             <a:fld id="{203DE63F-52CA-457A-9BA3-B26F08945099}" type="datetimeFigureOut">
               <a:rPr lang="en-GB" smtClean="0"/>
-              <a:t>27/02/2026</a:t>
+              <a:t>28/02/2026</a:t>
             </a:fld>
             <a:endParaRPr lang="en-GB"/>
           </a:p>
@@ -2684,7 +3050,7 @@
           <a:p>
             <a:fld id="{203DE63F-52CA-457A-9BA3-B26F08945099}" type="datetimeFigureOut">
               <a:rPr lang="en-GB" smtClean="0"/>
-              <a:t>27/02/2026</a:t>
+              <a:t>28/02/2026</a:t>
             </a:fld>
             <a:endParaRPr lang="en-GB"/>
           </a:p>
@@ -2927,7 +3293,7 @@
           <a:p>
             <a:fld id="{203DE63F-52CA-457A-9BA3-B26F08945099}" type="datetimeFigureOut">
               <a:rPr lang="en-GB" smtClean="0"/>
-              <a:t>27/02/2026</a:t>
+              <a:t>28/02/2026</a:t>
             </a:fld>
             <a:endParaRPr lang="en-GB"/>
           </a:p>
@@ -3360,7 +3726,12 @@
             <p:ph type="ctrTitle"/>
           </p:nvPr>
         </p:nvSpPr>
-        <p:spPr/>
+        <p:spPr>
+          <a:xfrm>
+            <a:off x="2890683" y="2182761"/>
+            <a:ext cx="6410632" cy="1032234"/>
+          </a:xfrm>
+        </p:spPr>
         <p:txBody>
           <a:bodyPr/>
           <a:lstStyle/>
@@ -3388,7 +3759,12 @@
             <p:ph type="subTitle" idx="1"/>
           </p:nvPr>
         </p:nvSpPr>
-        <p:spPr/>
+        <p:spPr>
+          <a:xfrm>
+            <a:off x="4508090" y="3429000"/>
+            <a:ext cx="3175819" cy="901136"/>
+          </a:xfrm>
+        </p:spPr>
         <p:txBody>
           <a:bodyPr/>
           <a:lstStyle/>
@@ -3413,6 +3789,138 @@
     <p:extLst>
       <p:ext uri="{BB962C8B-B14F-4D97-AF65-F5344CB8AC3E}">
         <p14:creationId xmlns:p14="http://schemas.microsoft.com/office/powerpoint/2010/main" val="3290967512"/>
+      </p:ext>
+    </p:extLst>
+  </p:cSld>
+  <p:clrMapOvr>
+    <a:masterClrMapping/>
+  </p:clrMapOvr>
+</p:sld>
+</file>
+
+<file path=ppt/slides/slide10.xml><?xml version="1.0" encoding="utf-8"?>
+<p:sld xmlns:a="http://schemas.openxmlformats.org/drawingml/2006/main" xmlns:r="http://schemas.openxmlformats.org/officeDocument/2006/relationships" xmlns:p="http://schemas.openxmlformats.org/presentationml/2006/main">
+  <p:cSld>
+    <p:spTree>
+      <p:nvGrpSpPr>
+        <p:cNvPr id="1" name=""/>
+        <p:cNvGrpSpPr/>
+        <p:nvPr/>
+      </p:nvGrpSpPr>
+      <p:grpSpPr>
+        <a:xfrm>
+          <a:off x="0" y="0"/>
+          <a:ext cx="0" cy="0"/>
+          <a:chOff x="0" y="0"/>
+          <a:chExt cx="0" cy="0"/>
+        </a:xfrm>
+      </p:grpSpPr>
+      <p:sp>
+        <p:nvSpPr>
+          <p:cNvPr id="2" name="CasellaDiTesto 1">
+            <a:extLst>
+              <a:ext uri="{FF2B5EF4-FFF2-40B4-BE49-F238E27FC236}">
+                <a16:creationId xmlns:a16="http://schemas.microsoft.com/office/drawing/2014/main" id="{62ADE748-503A-BAAE-4212-CC3B68E5D184}"/>
+              </a:ext>
+            </a:extLst>
+          </p:cNvPr>
+          <p:cNvSpPr txBox="1"/>
+          <p:nvPr/>
+        </p:nvSpPr>
+        <p:spPr>
+          <a:xfrm>
+            <a:off x="3628103" y="782720"/>
+            <a:ext cx="4798142" cy="523220"/>
+          </a:xfrm>
+          <a:prstGeom prst="rect">
+            <a:avLst/>
+          </a:prstGeom>
+          <a:noFill/>
+        </p:spPr>
+        <p:txBody>
+          <a:bodyPr wrap="square" rtlCol="0">
+            <a:spAutoFit/>
+          </a:bodyPr>
+          <a:lstStyle/>
+          <a:p>
+            <a:pPr algn="ctr"/>
+            <a:r>
+              <a:rPr lang="en-GB" sz="2800" dirty="0"/>
+              <a:t>Weak scaling</a:t>
+            </a:r>
+          </a:p>
+        </p:txBody>
+      </p:sp>
+    </p:spTree>
+    <p:extLst>
+      <p:ext uri="{BB962C8B-B14F-4D97-AF65-F5344CB8AC3E}">
+        <p14:creationId xmlns:p14="http://schemas.microsoft.com/office/powerpoint/2010/main" val="2714814174"/>
+      </p:ext>
+    </p:extLst>
+  </p:cSld>
+  <p:clrMapOvr>
+    <a:masterClrMapping/>
+  </p:clrMapOvr>
+</p:sld>
+</file>
+
+<file path=ppt/slides/slide11.xml><?xml version="1.0" encoding="utf-8"?>
+<p:sld xmlns:a="http://schemas.openxmlformats.org/drawingml/2006/main" xmlns:r="http://schemas.openxmlformats.org/officeDocument/2006/relationships" xmlns:p="http://schemas.openxmlformats.org/presentationml/2006/main">
+  <p:cSld>
+    <p:spTree>
+      <p:nvGrpSpPr>
+        <p:cNvPr id="1" name=""/>
+        <p:cNvGrpSpPr/>
+        <p:nvPr/>
+      </p:nvGrpSpPr>
+      <p:grpSpPr>
+        <a:xfrm>
+          <a:off x="0" y="0"/>
+          <a:ext cx="0" cy="0"/>
+          <a:chOff x="0" y="0"/>
+          <a:chExt cx="0" cy="0"/>
+        </a:xfrm>
+      </p:grpSpPr>
+      <p:sp>
+        <p:nvSpPr>
+          <p:cNvPr id="2" name="CasellaDiTesto 1">
+            <a:extLst>
+              <a:ext uri="{FF2B5EF4-FFF2-40B4-BE49-F238E27FC236}">
+                <a16:creationId xmlns:a16="http://schemas.microsoft.com/office/drawing/2014/main" id="{379B36CC-D10E-808B-F4C8-AD6015D9400A}"/>
+              </a:ext>
+            </a:extLst>
+          </p:cNvPr>
+          <p:cNvSpPr txBox="1"/>
+          <p:nvPr/>
+        </p:nvSpPr>
+        <p:spPr>
+          <a:xfrm>
+            <a:off x="3795252" y="658761"/>
+            <a:ext cx="4925961" cy="461665"/>
+          </a:xfrm>
+          <a:prstGeom prst="rect">
+            <a:avLst/>
+          </a:prstGeom>
+          <a:noFill/>
+        </p:spPr>
+        <p:txBody>
+          <a:bodyPr wrap="square" rtlCol="0">
+            <a:spAutoFit/>
+          </a:bodyPr>
+          <a:lstStyle/>
+          <a:p>
+            <a:pPr algn="ctr"/>
+            <a:r>
+              <a:rPr lang="en-GB" sz="2400" dirty="0"/>
+              <a:t>Conclusions</a:t>
+            </a:r>
+          </a:p>
+        </p:txBody>
+      </p:sp>
+    </p:spTree>
+    <p:extLst>
+      <p:ext uri="{BB962C8B-B14F-4D97-AF65-F5344CB8AC3E}">
+        <p14:creationId xmlns:p14="http://schemas.microsoft.com/office/powerpoint/2010/main" val="1224286659"/>
       </p:ext>
     </p:extLst>
   </p:cSld>
@@ -3581,13 +4089,8 @@
             </a:pPr>
             <a:r>
               <a:rPr lang="en-GB" dirty="0"/>
-              <a:t>Hybrid parallelization of 5 point stencil method using MPI and </a:t>
-            </a:r>
-            <a:r>
-              <a:rPr lang="en-GB" dirty="0" err="1"/>
-              <a:t>OpenMp</a:t>
-            </a:r>
-            <a:endParaRPr lang="en-GB" dirty="0"/>
+              <a:t>Hybrid parallelization of 5 point stencil method using MPI and OpenMP</a:t>
+            </a:r>
           </a:p>
           <a:p>
             <a:pPr marL="285750" indent="-285750">
@@ -3688,8 +4191,8 @@
         </p:nvSpPr>
         <p:spPr>
           <a:xfrm>
-            <a:off x="1708220" y="763675"/>
-            <a:ext cx="5476351" cy="461665"/>
+            <a:off x="3182140" y="521492"/>
+            <a:ext cx="5827719" cy="461665"/>
           </a:xfrm>
           <a:prstGeom prst="rect">
             <a:avLst/>
@@ -3704,8 +4207,1391 @@
           <a:p>
             <a:r>
               <a:rPr lang="en-GB" sz="2400" dirty="0"/>
-              <a:t>Discretization of the heat equation</a:t>
-            </a:r>
+              <a:t>Discretization of the 2D heat equation</a:t>
+            </a:r>
+          </a:p>
+        </p:txBody>
+      </p:sp>
+      <mc:AlternateContent xmlns:mc="http://schemas.openxmlformats.org/markup-compatibility/2006">
+        <mc:Choice xmlns:a14="http://schemas.microsoft.com/office/drawing/2010/main" Requires="a14">
+          <p:sp>
+            <p:nvSpPr>
+              <p:cNvPr id="5" name="CasellaDiTesto 4">
+                <a:extLst>
+                  <a:ext uri="{FF2B5EF4-FFF2-40B4-BE49-F238E27FC236}">
+                    <a16:creationId xmlns:a16="http://schemas.microsoft.com/office/drawing/2014/main" id="{B48691DC-0CF1-1C74-7BD1-A51B2F6EAC5E}"/>
+                  </a:ext>
+                </a:extLst>
+              </p:cNvPr>
+              <p:cNvSpPr txBox="1"/>
+              <p:nvPr/>
+            </p:nvSpPr>
+            <p:spPr>
+              <a:xfrm>
+                <a:off x="1028832" y="1572512"/>
+                <a:ext cx="3146840" cy="627992"/>
+              </a:xfrm>
+              <a:prstGeom prst="rect">
+                <a:avLst/>
+              </a:prstGeom>
+              <a:noFill/>
+            </p:spPr>
+            <p:txBody>
+              <a:bodyPr wrap="square" lIns="0" tIns="0" rIns="0" bIns="0" rtlCol="0">
+                <a:spAutoFit/>
+              </a:bodyPr>
+              <a:lstStyle/>
+              <a:p>
+                <a14:m>
+                  <m:oMathPara xmlns:m="http://schemas.openxmlformats.org/officeDocument/2006/math">
+                    <m:oMathParaPr>
+                      <m:jc m:val="centerGroup"/>
+                    </m:oMathParaPr>
+                    <m:oMath xmlns:m="http://schemas.openxmlformats.org/officeDocument/2006/math">
+                      <m:f>
+                        <m:fPr>
+                          <m:ctrlPr>
+                            <a:rPr lang="en-GB" b="0" i="1" smtClean="0">
+                              <a:latin typeface="Cambria Math" panose="02040503050406030204" pitchFamily="18" charset="0"/>
+                            </a:rPr>
+                          </m:ctrlPr>
+                        </m:fPr>
+                        <m:num>
+                          <m:r>
+                            <a:rPr lang="en-GB" b="0" i="1" smtClean="0">
+                              <a:latin typeface="Cambria Math" panose="02040503050406030204" pitchFamily="18" charset="0"/>
+                            </a:rPr>
+                            <m:t>𝜕</m:t>
+                          </m:r>
+                          <m:r>
+                            <a:rPr lang="en-GB" b="0" i="1" smtClean="0">
+                              <a:latin typeface="Cambria Math" panose="02040503050406030204" pitchFamily="18" charset="0"/>
+                            </a:rPr>
+                            <m:t>𝑢</m:t>
+                          </m:r>
+                        </m:num>
+                        <m:den>
+                          <m:r>
+                            <a:rPr lang="en-GB" b="0" i="1" smtClean="0">
+                              <a:latin typeface="Cambria Math" panose="02040503050406030204" pitchFamily="18" charset="0"/>
+                            </a:rPr>
+                            <m:t>𝜕</m:t>
+                          </m:r>
+                          <m:r>
+                            <a:rPr lang="en-GB" b="0" i="1" smtClean="0">
+                              <a:latin typeface="Cambria Math" panose="02040503050406030204" pitchFamily="18" charset="0"/>
+                            </a:rPr>
+                            <m:t>𝑡</m:t>
+                          </m:r>
+                        </m:den>
+                      </m:f>
+                      <m:r>
+                        <a:rPr lang="en-GB" b="0" i="1" smtClean="0">
+                          <a:latin typeface="Cambria Math" panose="02040503050406030204" pitchFamily="18" charset="0"/>
+                        </a:rPr>
+                        <m:t>=</m:t>
+                      </m:r>
+                      <m:r>
+                        <a:rPr lang="en-GB" b="0" i="1" smtClean="0">
+                          <a:latin typeface="Cambria Math" panose="02040503050406030204" pitchFamily="18" charset="0"/>
+                        </a:rPr>
+                        <m:t>𝛼</m:t>
+                      </m:r>
+                      <m:sSup>
+                        <m:sSupPr>
+                          <m:ctrlPr>
+                            <a:rPr lang="en-GB" b="0" i="1" smtClean="0">
+                              <a:latin typeface="Cambria Math" panose="02040503050406030204" pitchFamily="18" charset="0"/>
+                            </a:rPr>
+                          </m:ctrlPr>
+                        </m:sSupPr>
+                        <m:e>
+                          <m:r>
+                            <m:rPr>
+                              <m:sty m:val="p"/>
+                            </m:rPr>
+                            <a:rPr lang="en-GB" b="0" i="0" smtClean="0">
+                              <a:latin typeface="Cambria Math" panose="02040503050406030204" pitchFamily="18" charset="0"/>
+                            </a:rPr>
+                            <m:t>∇</m:t>
+                          </m:r>
+                        </m:e>
+                        <m:sup>
+                          <m:r>
+                            <a:rPr lang="en-GB" b="0" i="1" smtClean="0">
+                              <a:latin typeface="Cambria Math" panose="02040503050406030204" pitchFamily="18" charset="0"/>
+                            </a:rPr>
+                            <m:t>2</m:t>
+                          </m:r>
+                        </m:sup>
+                      </m:sSup>
+                      <m:r>
+                        <a:rPr lang="en-GB" b="0" i="1" smtClean="0">
+                          <a:latin typeface="Cambria Math" panose="02040503050406030204" pitchFamily="18" charset="0"/>
+                        </a:rPr>
+                        <m:t>𝑢</m:t>
+                      </m:r>
+                      <m:r>
+                        <a:rPr lang="en-GB" b="0" i="1" smtClean="0">
+                          <a:latin typeface="Cambria Math" panose="02040503050406030204" pitchFamily="18" charset="0"/>
+                        </a:rPr>
+                        <m:t>=</m:t>
+                      </m:r>
+                      <m:r>
+                        <a:rPr lang="en-GB" b="0" i="1" smtClean="0">
+                          <a:latin typeface="Cambria Math" panose="02040503050406030204" pitchFamily="18" charset="0"/>
+                        </a:rPr>
+                        <m:t>𝛼</m:t>
+                      </m:r>
+                      <m:d>
+                        <m:dPr>
+                          <m:ctrlPr>
+                            <a:rPr lang="en-GB" b="0" i="1" smtClean="0">
+                              <a:latin typeface="Cambria Math" panose="02040503050406030204" pitchFamily="18" charset="0"/>
+                            </a:rPr>
+                          </m:ctrlPr>
+                        </m:dPr>
+                        <m:e>
+                          <m:f>
+                            <m:fPr>
+                              <m:ctrlPr>
+                                <a:rPr lang="en-GB" b="0" i="1" smtClean="0">
+                                  <a:latin typeface="Cambria Math" panose="02040503050406030204" pitchFamily="18" charset="0"/>
+                                </a:rPr>
+                              </m:ctrlPr>
+                            </m:fPr>
+                            <m:num>
+                              <m:sSup>
+                                <m:sSupPr>
+                                  <m:ctrlPr>
+                                    <a:rPr lang="en-GB" b="0" i="1" smtClean="0">
+                                      <a:latin typeface="Cambria Math" panose="02040503050406030204" pitchFamily="18" charset="0"/>
+                                    </a:rPr>
+                                  </m:ctrlPr>
+                                </m:sSupPr>
+                                <m:e>
+                                  <m:r>
+                                    <a:rPr lang="en-GB" b="0" i="1" smtClean="0">
+                                      <a:latin typeface="Cambria Math" panose="02040503050406030204" pitchFamily="18" charset="0"/>
+                                    </a:rPr>
+                                    <m:t>𝜕</m:t>
+                                  </m:r>
+                                </m:e>
+                                <m:sup>
+                                  <m:r>
+                                    <a:rPr lang="en-GB" b="0" i="1" smtClean="0">
+                                      <a:latin typeface="Cambria Math" panose="02040503050406030204" pitchFamily="18" charset="0"/>
+                                    </a:rPr>
+                                    <m:t>2</m:t>
+                                  </m:r>
+                                </m:sup>
+                              </m:sSup>
+                              <m:r>
+                                <a:rPr lang="en-GB" b="0" i="1" smtClean="0">
+                                  <a:latin typeface="Cambria Math" panose="02040503050406030204" pitchFamily="18" charset="0"/>
+                                </a:rPr>
+                                <m:t>𝑢</m:t>
+                              </m:r>
+                            </m:num>
+                            <m:den>
+                              <m:r>
+                                <a:rPr lang="en-GB" b="0" i="1" smtClean="0">
+                                  <a:latin typeface="Cambria Math" panose="02040503050406030204" pitchFamily="18" charset="0"/>
+                                </a:rPr>
+                                <m:t>𝜕</m:t>
+                              </m:r>
+                              <m:sSup>
+                                <m:sSupPr>
+                                  <m:ctrlPr>
+                                    <a:rPr lang="en-GB" b="0" i="1" smtClean="0">
+                                      <a:latin typeface="Cambria Math" panose="02040503050406030204" pitchFamily="18" charset="0"/>
+                                    </a:rPr>
+                                  </m:ctrlPr>
+                                </m:sSupPr>
+                                <m:e>
+                                  <m:r>
+                                    <a:rPr lang="en-GB" b="0" i="1" smtClean="0">
+                                      <a:latin typeface="Cambria Math" panose="02040503050406030204" pitchFamily="18" charset="0"/>
+                                    </a:rPr>
+                                    <m:t>𝑥</m:t>
+                                  </m:r>
+                                </m:e>
+                                <m:sup>
+                                  <m:r>
+                                    <a:rPr lang="en-GB" b="0" i="1" smtClean="0">
+                                      <a:latin typeface="Cambria Math" panose="02040503050406030204" pitchFamily="18" charset="0"/>
+                                    </a:rPr>
+                                    <m:t>2</m:t>
+                                  </m:r>
+                                </m:sup>
+                              </m:sSup>
+                            </m:den>
+                          </m:f>
+                          <m:r>
+                            <a:rPr lang="en-GB" b="0" i="1" smtClean="0">
+                              <a:latin typeface="Cambria Math" panose="02040503050406030204" pitchFamily="18" charset="0"/>
+                            </a:rPr>
+                            <m:t>+</m:t>
+                          </m:r>
+                          <m:f>
+                            <m:fPr>
+                              <m:ctrlPr>
+                                <a:rPr lang="en-GB" b="0" i="1" smtClean="0">
+                                  <a:latin typeface="Cambria Math" panose="02040503050406030204" pitchFamily="18" charset="0"/>
+                                </a:rPr>
+                              </m:ctrlPr>
+                            </m:fPr>
+                            <m:num>
+                              <m:sSup>
+                                <m:sSupPr>
+                                  <m:ctrlPr>
+                                    <a:rPr lang="en-GB" b="0" i="1" smtClean="0">
+                                      <a:latin typeface="Cambria Math" panose="02040503050406030204" pitchFamily="18" charset="0"/>
+                                    </a:rPr>
+                                  </m:ctrlPr>
+                                </m:sSupPr>
+                                <m:e>
+                                  <m:r>
+                                    <a:rPr lang="en-GB" b="0" i="1" smtClean="0">
+                                      <a:latin typeface="Cambria Math" panose="02040503050406030204" pitchFamily="18" charset="0"/>
+                                    </a:rPr>
+                                    <m:t>𝜕</m:t>
+                                  </m:r>
+                                </m:e>
+                                <m:sup>
+                                  <m:r>
+                                    <a:rPr lang="en-GB" b="0" i="1" smtClean="0">
+                                      <a:latin typeface="Cambria Math" panose="02040503050406030204" pitchFamily="18" charset="0"/>
+                                    </a:rPr>
+                                    <m:t>2</m:t>
+                                  </m:r>
+                                </m:sup>
+                              </m:sSup>
+                              <m:r>
+                                <a:rPr lang="en-GB" b="0" i="1" smtClean="0">
+                                  <a:latin typeface="Cambria Math" panose="02040503050406030204" pitchFamily="18" charset="0"/>
+                                </a:rPr>
+                                <m:t>𝑢</m:t>
+                              </m:r>
+                            </m:num>
+                            <m:den>
+                              <m:r>
+                                <a:rPr lang="en-GB" b="0" i="1" smtClean="0">
+                                  <a:latin typeface="Cambria Math" panose="02040503050406030204" pitchFamily="18" charset="0"/>
+                                </a:rPr>
+                                <m:t>𝜕</m:t>
+                              </m:r>
+                              <m:sSup>
+                                <m:sSupPr>
+                                  <m:ctrlPr>
+                                    <a:rPr lang="en-GB" b="0" i="1" smtClean="0">
+                                      <a:latin typeface="Cambria Math" panose="02040503050406030204" pitchFamily="18" charset="0"/>
+                                    </a:rPr>
+                                  </m:ctrlPr>
+                                </m:sSupPr>
+                                <m:e>
+                                  <m:r>
+                                    <a:rPr lang="en-GB" b="0" i="1" smtClean="0">
+                                      <a:latin typeface="Cambria Math" panose="02040503050406030204" pitchFamily="18" charset="0"/>
+                                    </a:rPr>
+                                    <m:t>𝑦</m:t>
+                                  </m:r>
+                                </m:e>
+                                <m:sup>
+                                  <m:r>
+                                    <a:rPr lang="en-GB" b="0" i="1" smtClean="0">
+                                      <a:latin typeface="Cambria Math" panose="02040503050406030204" pitchFamily="18" charset="0"/>
+                                    </a:rPr>
+                                    <m:t>2</m:t>
+                                  </m:r>
+                                </m:sup>
+                              </m:sSup>
+                            </m:den>
+                          </m:f>
+                        </m:e>
+                      </m:d>
+                    </m:oMath>
+                  </m:oMathPara>
+                </a14:m>
+              </a:p>
+            </p:txBody>
+          </p:sp>
+        </mc:Choice>
+        <mc:Fallback>
+          <p:sp>
+            <p:nvSpPr>
+              <p:cNvPr id="5" name="CasellaDiTesto 4">
+                <a:extLst>
+                  <a:ext uri="{FF2B5EF4-FFF2-40B4-BE49-F238E27FC236}">
+                    <a16:creationId xmlns:a16="http://schemas.microsoft.com/office/drawing/2014/main" id="{B48691DC-0CF1-1C74-7BD1-A51B2F6EAC5E}"/>
+                  </a:ext>
+                </a:extLst>
+              </p:cNvPr>
+              <p:cNvSpPr txBox="1">
+                <a:spLocks noRot="1" noChangeAspect="1" noMove="1" noResize="1" noEditPoints="1" noAdjustHandles="1" noChangeArrowheads="1" noChangeShapeType="1" noTextEdit="1"/>
+              </p:cNvSpPr>
+              <p:nvPr/>
+            </p:nvSpPr>
+            <p:spPr>
+              <a:xfrm>
+                <a:off x="1028832" y="1572512"/>
+                <a:ext cx="3146840" cy="627992"/>
+              </a:xfrm>
+              <a:prstGeom prst="rect">
+                <a:avLst/>
+              </a:prstGeom>
+              <a:blipFill>
+                <a:blip r:embed="rId2"/>
+                <a:stretch>
+                  <a:fillRect/>
+                </a:stretch>
+              </a:blipFill>
+            </p:spPr>
+            <p:txBody>
+              <a:bodyPr/>
+              <a:lstStyle/>
+              <a:p>
+                <a:r>
+                  <a:rPr lang="en-GB">
+                    <a:noFill/>
+                  </a:rPr>
+                  <a:t> </a:t>
+                </a:r>
+              </a:p>
+            </p:txBody>
+          </p:sp>
+        </mc:Fallback>
+      </mc:AlternateContent>
+      <mc:AlternateContent xmlns:mc="http://schemas.openxmlformats.org/markup-compatibility/2006">
+        <mc:Choice xmlns:a14="http://schemas.microsoft.com/office/drawing/2010/main" Requires="a14">
+          <p:sp>
+            <p:nvSpPr>
+              <p:cNvPr id="6" name="CasellaDiTesto 5">
+                <a:extLst>
+                  <a:ext uri="{FF2B5EF4-FFF2-40B4-BE49-F238E27FC236}">
+                    <a16:creationId xmlns:a16="http://schemas.microsoft.com/office/drawing/2014/main" id="{85569284-EA49-1A85-96FD-8715025E1CFF}"/>
+                  </a:ext>
+                </a:extLst>
+              </p:cNvPr>
+              <p:cNvSpPr txBox="1"/>
+              <p:nvPr/>
+            </p:nvSpPr>
+            <p:spPr>
+              <a:xfrm>
+                <a:off x="727145" y="3573710"/>
+                <a:ext cx="6276933" cy="824649"/>
+              </a:xfrm>
+              <a:prstGeom prst="rect">
+                <a:avLst/>
+              </a:prstGeom>
+              <a:noFill/>
+            </p:spPr>
+            <p:txBody>
+              <a:bodyPr wrap="square" lIns="0" tIns="0" rIns="0" bIns="0" rtlCol="0">
+                <a:spAutoFit/>
+              </a:bodyPr>
+              <a:lstStyle/>
+              <a:p>
+                <a14:m>
+                  <m:oMathPara xmlns:m="http://schemas.openxmlformats.org/officeDocument/2006/math">
+                    <m:oMathParaPr>
+                      <m:jc m:val="centerGroup"/>
+                    </m:oMathParaPr>
+                    <m:oMath xmlns:m="http://schemas.openxmlformats.org/officeDocument/2006/math">
+                      <m:sSubSup>
+                        <m:sSubSupPr>
+                          <m:ctrlPr>
+                            <a:rPr lang="en-GB" smtClean="0">
+                              <a:latin typeface="Cambria Math" panose="02040503050406030204" pitchFamily="18" charset="0"/>
+                            </a:rPr>
+                          </m:ctrlPr>
+                        </m:sSubSupPr>
+                        <m:e>
+                          <m:r>
+                            <m:rPr>
+                              <m:sty m:val="p"/>
+                            </m:rPr>
+                            <a:rPr lang="en-GB" b="0" i="1" smtClean="0">
+                              <a:latin typeface="Cambria Math" panose="02040503050406030204" pitchFamily="18" charset="0"/>
+                            </a:rPr>
+                            <m:t>U</m:t>
+                          </m:r>
+                        </m:e>
+                        <m:sub>
+                          <m:r>
+                            <a:rPr lang="en-GB" i="1">
+                              <a:latin typeface="Cambria Math" panose="02040503050406030204" pitchFamily="18" charset="0"/>
+                            </a:rPr>
+                            <m:t>𝑖</m:t>
+                          </m:r>
+                          <m:r>
+                            <a:rPr lang="en-GB">
+                              <a:latin typeface="Cambria Math" panose="02040503050406030204" pitchFamily="18" charset="0"/>
+                            </a:rPr>
+                            <m:t>,</m:t>
+                          </m:r>
+                          <m:r>
+                            <a:rPr lang="en-GB" i="1">
+                              <a:latin typeface="Cambria Math" panose="02040503050406030204" pitchFamily="18" charset="0"/>
+                            </a:rPr>
+                            <m:t>𝑗</m:t>
+                          </m:r>
+                        </m:sub>
+                        <m:sup>
+                          <m:r>
+                            <a:rPr lang="en-GB" i="1">
+                              <a:latin typeface="Cambria Math" panose="02040503050406030204" pitchFamily="18" charset="0"/>
+                            </a:rPr>
+                            <m:t>𝑛</m:t>
+                          </m:r>
+                          <m:r>
+                            <a:rPr lang="en-GB">
+                              <a:latin typeface="Cambria Math" panose="02040503050406030204" pitchFamily="18" charset="0"/>
+                            </a:rPr>
+                            <m:t>+1</m:t>
+                          </m:r>
+                        </m:sup>
+                      </m:sSubSup>
+                      <m:r>
+                        <a:rPr lang="en-GB">
+                          <a:latin typeface="Cambria Math" panose="02040503050406030204" pitchFamily="18" charset="0"/>
+                        </a:rPr>
+                        <m:t>=</m:t>
+                      </m:r>
+                      <m:r>
+                        <a:rPr lang="en-GB" i="1">
+                          <a:latin typeface="Cambria Math" panose="02040503050406030204" pitchFamily="18" charset="0"/>
+                        </a:rPr>
+                        <m:t>𝛼</m:t>
+                      </m:r>
+                      <m:r>
+                        <a:rPr lang="en-GB" i="1">
+                          <a:latin typeface="Cambria Math" panose="02040503050406030204" pitchFamily="18" charset="0"/>
+                        </a:rPr>
+                        <m:t>⋅</m:t>
+                      </m:r>
+                      <m:sSubSup>
+                        <m:sSubSupPr>
+                          <m:ctrlPr>
+                            <a:rPr lang="en-GB" i="1">
+                              <a:latin typeface="Cambria Math" panose="02040503050406030204" pitchFamily="18" charset="0"/>
+                            </a:rPr>
+                          </m:ctrlPr>
+                        </m:sSubSupPr>
+                        <m:e>
+                          <m:r>
+                            <m:rPr>
+                              <m:sty m:val="p"/>
+                            </m:rPr>
+                            <a:rPr lang="en-GB" b="0" i="1" smtClean="0">
+                              <a:latin typeface="Cambria Math" panose="02040503050406030204" pitchFamily="18" charset="0"/>
+                            </a:rPr>
+                            <m:t>U</m:t>
+                          </m:r>
+                        </m:e>
+                        <m:sub>
+                          <m:r>
+                            <a:rPr lang="en-GB" i="1">
+                              <a:latin typeface="Cambria Math" panose="02040503050406030204" pitchFamily="18" charset="0"/>
+                            </a:rPr>
+                            <m:t>𝑖</m:t>
+                          </m:r>
+                          <m:r>
+                            <a:rPr lang="en-GB">
+                              <a:latin typeface="Cambria Math" panose="02040503050406030204" pitchFamily="18" charset="0"/>
+                            </a:rPr>
+                            <m:t>,</m:t>
+                          </m:r>
+                          <m:r>
+                            <a:rPr lang="en-GB" i="1">
+                              <a:latin typeface="Cambria Math" panose="02040503050406030204" pitchFamily="18" charset="0"/>
+                            </a:rPr>
+                            <m:t>𝑗</m:t>
+                          </m:r>
+                        </m:sub>
+                        <m:sup>
+                          <m:r>
+                            <a:rPr lang="en-GB" i="1">
+                              <a:latin typeface="Cambria Math" panose="02040503050406030204" pitchFamily="18" charset="0"/>
+                            </a:rPr>
+                            <m:t>𝑛</m:t>
+                          </m:r>
+                        </m:sup>
+                      </m:sSubSup>
+                      <m:r>
+                        <a:rPr lang="en-GB">
+                          <a:latin typeface="Cambria Math" panose="02040503050406030204" pitchFamily="18" charset="0"/>
+                        </a:rPr>
+                        <m:t>+</m:t>
+                      </m:r>
+                      <m:f>
+                        <m:fPr>
+                          <m:ctrlPr>
+                            <a:rPr lang="en-GB" i="1">
+                              <a:latin typeface="Cambria Math" panose="02040503050406030204" pitchFamily="18" charset="0"/>
+                            </a:rPr>
+                          </m:ctrlPr>
+                        </m:fPr>
+                        <m:num>
+                          <m:r>
+                            <a:rPr lang="en-GB">
+                              <a:latin typeface="Cambria Math" panose="02040503050406030204" pitchFamily="18" charset="0"/>
+                            </a:rPr>
+                            <m:t>1</m:t>
+                          </m:r>
+                          <m:r>
+                            <a:rPr lang="en-GB" i="1">
+                              <a:latin typeface="Cambria Math" panose="02040503050406030204" pitchFamily="18" charset="0"/>
+                            </a:rPr>
+                            <m:t>−</m:t>
+                          </m:r>
+                          <m:r>
+                            <a:rPr lang="en-GB" i="1">
+                              <a:latin typeface="Cambria Math" panose="02040503050406030204" pitchFamily="18" charset="0"/>
+                            </a:rPr>
+                            <m:t>𝛼</m:t>
+                          </m:r>
+                        </m:num>
+                        <m:den>
+                          <m:r>
+                            <a:rPr lang="en-GB">
+                              <a:latin typeface="Cambria Math" panose="02040503050406030204" pitchFamily="18" charset="0"/>
+                            </a:rPr>
+                            <m:t>4</m:t>
+                          </m:r>
+                        </m:den>
+                      </m:f>
+                      <m:d>
+                        <m:dPr>
+                          <m:ctrlPr>
+                            <a:rPr lang="en-GB" i="1">
+                              <a:latin typeface="Cambria Math" panose="02040503050406030204" pitchFamily="18" charset="0"/>
+                            </a:rPr>
+                          </m:ctrlPr>
+                        </m:dPr>
+                        <m:e>
+                          <m:sSubSup>
+                            <m:sSubSupPr>
+                              <m:ctrlPr>
+                                <a:rPr lang="en-GB" i="1">
+                                  <a:latin typeface="Cambria Math" panose="02040503050406030204" pitchFamily="18" charset="0"/>
+                                </a:rPr>
+                              </m:ctrlPr>
+                            </m:sSubSupPr>
+                            <m:e>
+                              <m:r>
+                                <m:rPr>
+                                  <m:sty m:val="p"/>
+                                </m:rPr>
+                                <a:rPr lang="en-GB" b="0" i="1" smtClean="0">
+                                  <a:latin typeface="Cambria Math" panose="02040503050406030204" pitchFamily="18" charset="0"/>
+                                </a:rPr>
+                                <m:t>U</m:t>
+                              </m:r>
+                            </m:e>
+                            <m:sub>
+                              <m:r>
+                                <a:rPr lang="en-GB" i="1">
+                                  <a:latin typeface="Cambria Math" panose="02040503050406030204" pitchFamily="18" charset="0"/>
+                                </a:rPr>
+                                <m:t>𝑖</m:t>
+                              </m:r>
+                              <m:r>
+                                <a:rPr lang="en-GB" i="1">
+                                  <a:latin typeface="Cambria Math" panose="02040503050406030204" pitchFamily="18" charset="0"/>
+                                </a:rPr>
+                                <m:t>−</m:t>
+                              </m:r>
+                              <m:r>
+                                <a:rPr lang="en-GB">
+                                  <a:latin typeface="Cambria Math" panose="02040503050406030204" pitchFamily="18" charset="0"/>
+                                </a:rPr>
+                                <m:t>1,</m:t>
+                              </m:r>
+                              <m:r>
+                                <a:rPr lang="en-GB" i="1">
+                                  <a:latin typeface="Cambria Math" panose="02040503050406030204" pitchFamily="18" charset="0"/>
+                                </a:rPr>
+                                <m:t>𝑗</m:t>
+                              </m:r>
+                            </m:sub>
+                            <m:sup>
+                              <m:r>
+                                <a:rPr lang="en-GB" i="1">
+                                  <a:latin typeface="Cambria Math" panose="02040503050406030204" pitchFamily="18" charset="0"/>
+                                </a:rPr>
+                                <m:t>𝑛</m:t>
+                              </m:r>
+                            </m:sup>
+                          </m:sSubSup>
+                          <m:r>
+                            <a:rPr lang="en-GB">
+                              <a:latin typeface="Cambria Math" panose="02040503050406030204" pitchFamily="18" charset="0"/>
+                            </a:rPr>
+                            <m:t>+</m:t>
+                          </m:r>
+                          <m:sSubSup>
+                            <m:sSubSupPr>
+                              <m:ctrlPr>
+                                <a:rPr lang="en-GB" i="1">
+                                  <a:latin typeface="Cambria Math" panose="02040503050406030204" pitchFamily="18" charset="0"/>
+                                </a:rPr>
+                              </m:ctrlPr>
+                            </m:sSubSupPr>
+                            <m:e>
+                              <m:r>
+                                <m:rPr>
+                                  <m:sty m:val="p"/>
+                                </m:rPr>
+                                <a:rPr lang="en-GB" b="0" i="1" smtClean="0">
+                                  <a:latin typeface="Cambria Math" panose="02040503050406030204" pitchFamily="18" charset="0"/>
+                                </a:rPr>
+                                <m:t>U</m:t>
+                              </m:r>
+                            </m:e>
+                            <m:sub>
+                              <m:r>
+                                <a:rPr lang="en-GB" i="1">
+                                  <a:latin typeface="Cambria Math" panose="02040503050406030204" pitchFamily="18" charset="0"/>
+                                </a:rPr>
+                                <m:t>𝑖</m:t>
+                              </m:r>
+                              <m:r>
+                                <a:rPr lang="en-GB">
+                                  <a:latin typeface="Cambria Math" panose="02040503050406030204" pitchFamily="18" charset="0"/>
+                                </a:rPr>
+                                <m:t>+1,</m:t>
+                              </m:r>
+                              <m:r>
+                                <a:rPr lang="en-GB" i="1">
+                                  <a:latin typeface="Cambria Math" panose="02040503050406030204" pitchFamily="18" charset="0"/>
+                                </a:rPr>
+                                <m:t>𝑗</m:t>
+                              </m:r>
+                            </m:sub>
+                            <m:sup>
+                              <m:r>
+                                <a:rPr lang="en-GB" i="1">
+                                  <a:latin typeface="Cambria Math" panose="02040503050406030204" pitchFamily="18" charset="0"/>
+                                </a:rPr>
+                                <m:t>𝑛</m:t>
+                              </m:r>
+                            </m:sup>
+                          </m:sSubSup>
+                          <m:r>
+                            <a:rPr lang="en-GB">
+                              <a:latin typeface="Cambria Math" panose="02040503050406030204" pitchFamily="18" charset="0"/>
+                            </a:rPr>
+                            <m:t>+</m:t>
+                          </m:r>
+                          <m:sSubSup>
+                            <m:sSubSupPr>
+                              <m:ctrlPr>
+                                <a:rPr lang="en-GB" i="1" smtClean="0">
+                                  <a:latin typeface="Cambria Math" panose="02040503050406030204" pitchFamily="18" charset="0"/>
+                                </a:rPr>
+                              </m:ctrlPr>
+                            </m:sSubSupPr>
+                            <m:e>
+                              <m:r>
+                                <m:rPr>
+                                  <m:sty m:val="p"/>
+                                </m:rPr>
+                                <a:rPr lang="en-GB" b="0" i="1" smtClean="0">
+                                  <a:latin typeface="Cambria Math" panose="02040503050406030204" pitchFamily="18" charset="0"/>
+                                </a:rPr>
+                                <m:t>U</m:t>
+                              </m:r>
+                            </m:e>
+                            <m:sub>
+                              <m:r>
+                                <a:rPr lang="en-GB" i="1">
+                                  <a:latin typeface="Cambria Math" panose="02040503050406030204" pitchFamily="18" charset="0"/>
+                                </a:rPr>
+                                <m:t>𝑖</m:t>
+                              </m:r>
+                              <m:r>
+                                <a:rPr lang="en-GB">
+                                  <a:latin typeface="Cambria Math" panose="02040503050406030204" pitchFamily="18" charset="0"/>
+                                </a:rPr>
+                                <m:t>,</m:t>
+                              </m:r>
+                              <m:r>
+                                <a:rPr lang="en-GB" i="1">
+                                  <a:latin typeface="Cambria Math" panose="02040503050406030204" pitchFamily="18" charset="0"/>
+                                </a:rPr>
+                                <m:t>𝑗</m:t>
+                              </m:r>
+                              <m:r>
+                                <a:rPr lang="en-GB" i="1">
+                                  <a:latin typeface="Cambria Math" panose="02040503050406030204" pitchFamily="18" charset="0"/>
+                                </a:rPr>
+                                <m:t>−</m:t>
+                              </m:r>
+                              <m:r>
+                                <a:rPr lang="en-GB">
+                                  <a:latin typeface="Cambria Math" panose="02040503050406030204" pitchFamily="18" charset="0"/>
+                                </a:rPr>
+                                <m:t>1</m:t>
+                              </m:r>
+                            </m:sub>
+                            <m:sup>
+                              <m:r>
+                                <a:rPr lang="en-GB" i="1">
+                                  <a:latin typeface="Cambria Math" panose="02040503050406030204" pitchFamily="18" charset="0"/>
+                                </a:rPr>
+                                <m:t>𝑛</m:t>
+                              </m:r>
+                            </m:sup>
+                          </m:sSubSup>
+                          <m:r>
+                            <a:rPr lang="en-GB">
+                              <a:latin typeface="Cambria Math" panose="02040503050406030204" pitchFamily="18" charset="0"/>
+                            </a:rPr>
+                            <m:t>+</m:t>
+                          </m:r>
+                          <m:sSubSup>
+                            <m:sSubSupPr>
+                              <m:ctrlPr>
+                                <a:rPr lang="en-GB" i="1" smtClean="0">
+                                  <a:latin typeface="Cambria Math" panose="02040503050406030204" pitchFamily="18" charset="0"/>
+                                </a:rPr>
+                              </m:ctrlPr>
+                            </m:sSubSupPr>
+                            <m:e>
+                              <m:r>
+                                <m:rPr>
+                                  <m:sty m:val="p"/>
+                                </m:rPr>
+                                <a:rPr lang="en-GB" b="0" i="1" smtClean="0">
+                                  <a:latin typeface="Cambria Math" panose="02040503050406030204" pitchFamily="18" charset="0"/>
+                                </a:rPr>
+                                <m:t>U</m:t>
+                              </m:r>
+                            </m:e>
+                            <m:sub>
+                              <m:r>
+                                <a:rPr lang="en-GB" i="1">
+                                  <a:latin typeface="Cambria Math" panose="02040503050406030204" pitchFamily="18" charset="0"/>
+                                </a:rPr>
+                                <m:t>𝑖</m:t>
+                              </m:r>
+                              <m:r>
+                                <a:rPr lang="en-GB">
+                                  <a:latin typeface="Cambria Math" panose="02040503050406030204" pitchFamily="18" charset="0"/>
+                                </a:rPr>
+                                <m:t>,</m:t>
+                              </m:r>
+                              <m:r>
+                                <a:rPr lang="en-GB" i="1">
+                                  <a:latin typeface="Cambria Math" panose="02040503050406030204" pitchFamily="18" charset="0"/>
+                                </a:rPr>
+                                <m:t>𝑗</m:t>
+                              </m:r>
+                              <m:r>
+                                <a:rPr lang="en-GB">
+                                  <a:latin typeface="Cambria Math" panose="02040503050406030204" pitchFamily="18" charset="0"/>
+                                </a:rPr>
+                                <m:t>+1</m:t>
+                              </m:r>
+                            </m:sub>
+                            <m:sup>
+                              <m:r>
+                                <a:rPr lang="en-GB" i="1">
+                                  <a:latin typeface="Cambria Math" panose="02040503050406030204" pitchFamily="18" charset="0"/>
+                                </a:rPr>
+                                <m:t>𝑛</m:t>
+                              </m:r>
+                            </m:sup>
+                          </m:sSubSup>
+                        </m:e>
+                      </m:d>
+                    </m:oMath>
+                  </m:oMathPara>
+                </a14:m>
+              </a:p>
+              <a:p>
+                <a:endParaRPr lang="en-GB" dirty="0"/>
+              </a:p>
+            </p:txBody>
+          </p:sp>
+        </mc:Choice>
+        <mc:Fallback>
+          <p:sp>
+            <p:nvSpPr>
+              <p:cNvPr id="6" name="CasellaDiTesto 5">
+                <a:extLst>
+                  <a:ext uri="{FF2B5EF4-FFF2-40B4-BE49-F238E27FC236}">
+                    <a16:creationId xmlns:a16="http://schemas.microsoft.com/office/drawing/2014/main" id="{85569284-EA49-1A85-96FD-8715025E1CFF}"/>
+                  </a:ext>
+                </a:extLst>
+              </p:cNvPr>
+              <p:cNvSpPr txBox="1">
+                <a:spLocks noRot="1" noChangeAspect="1" noMove="1" noResize="1" noEditPoints="1" noAdjustHandles="1" noChangeArrowheads="1" noChangeShapeType="1" noTextEdit="1"/>
+              </p:cNvSpPr>
+              <p:nvPr/>
+            </p:nvSpPr>
+            <p:spPr>
+              <a:xfrm>
+                <a:off x="727145" y="3573710"/>
+                <a:ext cx="6276933" cy="824649"/>
+              </a:xfrm>
+              <a:prstGeom prst="rect">
+                <a:avLst/>
+              </a:prstGeom>
+              <a:blipFill>
+                <a:blip r:embed="rId3"/>
+                <a:stretch>
+                  <a:fillRect/>
+                </a:stretch>
+              </a:blipFill>
+            </p:spPr>
+            <p:txBody>
+              <a:bodyPr/>
+              <a:lstStyle/>
+              <a:p>
+                <a:r>
+                  <a:rPr lang="en-GB">
+                    <a:noFill/>
+                  </a:rPr>
+                  <a:t> </a:t>
+                </a:r>
+              </a:p>
+            </p:txBody>
+          </p:sp>
+        </mc:Fallback>
+      </mc:AlternateContent>
+      <p:pic>
+        <p:nvPicPr>
+          <p:cNvPr id="8" name="Immagine 7" descr="Immagine che contiene diagramma, schermata, testo, cerchio&#10;&#10;Il contenuto generato dall'IA potrebbe non essere corretto.">
+            <a:extLst>
+              <a:ext uri="{FF2B5EF4-FFF2-40B4-BE49-F238E27FC236}">
+                <a16:creationId xmlns:a16="http://schemas.microsoft.com/office/drawing/2014/main" id="{E63A35EB-5D93-E80C-7290-CEE4871F6B9C}"/>
+              </a:ext>
+            </a:extLst>
+          </p:cNvPr>
+          <p:cNvPicPr>
+            <a:picLocks noChangeAspect="1"/>
+          </p:cNvPicPr>
+          <p:nvPr/>
+        </p:nvPicPr>
+        <p:blipFill>
+          <a:blip r:embed="rId4">
+            <a:extLst>
+              <a:ext uri="{28A0092B-C50C-407E-A947-70E740481C1C}">
+                <a14:useLocalDpi xmlns:a14="http://schemas.microsoft.com/office/drawing/2010/main" val="0"/>
+              </a:ext>
+            </a:extLst>
+          </a:blip>
+          <a:stretch>
+            <a:fillRect/>
+          </a:stretch>
+        </p:blipFill>
+        <p:spPr>
+          <a:xfrm>
+            <a:off x="7534556" y="1579900"/>
+            <a:ext cx="3771007" cy="3771007"/>
+          </a:xfrm>
+          <a:prstGeom prst="rect">
+            <a:avLst/>
+          </a:prstGeom>
+        </p:spPr>
+      </p:pic>
+      <mc:AlternateContent xmlns:mc="http://schemas.openxmlformats.org/markup-compatibility/2006">
+        <mc:Choice xmlns:a14="http://schemas.microsoft.com/office/drawing/2010/main" Requires="a14">
+          <p:sp>
+            <p:nvSpPr>
+              <p:cNvPr id="9" name="CasellaDiTesto 8">
+                <a:extLst>
+                  <a:ext uri="{FF2B5EF4-FFF2-40B4-BE49-F238E27FC236}">
+                    <a16:creationId xmlns:a16="http://schemas.microsoft.com/office/drawing/2014/main" id="{9506BEA2-29F2-51B7-1753-DAB1580ED382}"/>
+                  </a:ext>
+                </a:extLst>
+              </p:cNvPr>
+              <p:cNvSpPr txBox="1"/>
+              <p:nvPr/>
+            </p:nvSpPr>
+            <p:spPr>
+              <a:xfrm>
+                <a:off x="1024088" y="4358403"/>
+                <a:ext cx="5071912" cy="1846659"/>
+              </a:xfrm>
+              <a:prstGeom prst="rect">
+                <a:avLst/>
+              </a:prstGeom>
+              <a:noFill/>
+            </p:spPr>
+            <p:txBody>
+              <a:bodyPr wrap="square" rtlCol="0">
+                <a:spAutoFit/>
+              </a:bodyPr>
+              <a:lstStyle/>
+              <a:p>
+                <a:pPr marL="285750" indent="-285750">
+                  <a:buFont typeface="Arial" panose="020B0604020202020204" pitchFamily="34" charset="0"/>
+                  <a:buChar char="•"/>
+                </a:pPr>
+                <a14:m>
+                  <m:oMath xmlns:m="http://schemas.openxmlformats.org/officeDocument/2006/math">
+                    <m:r>
+                      <m:rPr>
+                        <m:sty m:val="p"/>
+                      </m:rPr>
+                      <a:rPr lang="en-GB" sz="1600" b="0" i="1" smtClean="0">
+                        <a:latin typeface="Cambria Math" panose="02040503050406030204" pitchFamily="18" charset="0"/>
+                      </a:rPr>
+                      <m:t>α</m:t>
+                    </m:r>
+                  </m:oMath>
+                </a14:m>
+                <a:r>
+                  <a:rPr lang="en-GB" sz="1600" dirty="0"/>
+                  <a:t> is the heat diffusivity parameter</a:t>
+                </a:r>
+              </a:p>
+              <a:p>
+                <a:pPr marL="285750" indent="-285750">
+                  <a:buFont typeface="Arial" panose="020B0604020202020204" pitchFamily="34" charset="0"/>
+                  <a:buChar char="•"/>
+                </a:pPr>
+                <a:endParaRPr lang="en-GB" sz="1600" dirty="0"/>
+              </a:p>
+              <a:p>
+                <a:pPr marL="285750" indent="-285750">
+                  <a:buFont typeface="Arial" panose="020B0604020202020204" pitchFamily="34" charset="0"/>
+                  <a:buChar char="•"/>
+                </a:pPr>
+                <a:r>
+                  <a:rPr lang="en-GB" sz="1600" dirty="0"/>
+                  <a:t>Each value at the timestep </a:t>
+                </a:r>
+                <a14:m>
+                  <m:oMath xmlns:m="http://schemas.openxmlformats.org/officeDocument/2006/math">
+                    <m:r>
+                      <a:rPr lang="en-GB" sz="1600" i="1" dirty="0" smtClean="0">
+                        <a:latin typeface="Cambria Math" panose="02040503050406030204" pitchFamily="18" charset="0"/>
+                      </a:rPr>
+                      <m:t>𝑛</m:t>
+                    </m:r>
+                    <m:r>
+                      <a:rPr lang="en-GB" sz="1600" i="1" dirty="0">
+                        <a:latin typeface="Cambria Math" panose="02040503050406030204" pitchFamily="18" charset="0"/>
+                      </a:rPr>
+                      <m:t>+1 </m:t>
+                    </m:r>
+                  </m:oMath>
+                </a14:m>
+                <a:r>
+                  <a:rPr lang="en-GB" sz="1600" dirty="0"/>
+                  <a:t>at position </a:t>
+                </a:r>
+                <a14:m>
+                  <m:oMath xmlns:m="http://schemas.openxmlformats.org/officeDocument/2006/math">
+                    <m:r>
+                      <a:rPr lang="en-GB" sz="1600" i="1" dirty="0" smtClean="0">
+                        <a:latin typeface="Cambria Math" panose="02040503050406030204" pitchFamily="18" charset="0"/>
+                      </a:rPr>
+                      <m:t>(</m:t>
+                    </m:r>
+                    <m:r>
+                      <a:rPr lang="en-GB" sz="1600" i="1" dirty="0" err="1">
+                        <a:latin typeface="Cambria Math" panose="02040503050406030204" pitchFamily="18" charset="0"/>
+                      </a:rPr>
+                      <m:t>𝑖</m:t>
+                    </m:r>
+                    <m:r>
+                      <a:rPr lang="en-GB" sz="1600" i="1" dirty="0" err="1">
+                        <a:latin typeface="Cambria Math" panose="02040503050406030204" pitchFamily="18" charset="0"/>
+                      </a:rPr>
+                      <m:t>,</m:t>
+                    </m:r>
+                    <m:r>
+                      <a:rPr lang="en-GB" sz="1600" i="1" dirty="0" err="1">
+                        <a:latin typeface="Cambria Math" panose="02040503050406030204" pitchFamily="18" charset="0"/>
+                      </a:rPr>
+                      <m:t>𝑗</m:t>
+                    </m:r>
+                    <m:r>
+                      <a:rPr lang="en-GB" sz="1600" i="1" dirty="0" smtClean="0">
+                        <a:latin typeface="Cambria Math" panose="02040503050406030204" pitchFamily="18" charset="0"/>
+                      </a:rPr>
+                      <m:t>) </m:t>
+                    </m:r>
+                  </m:oMath>
+                </a14:m>
+                <a:r>
+                  <a:rPr lang="en-GB" sz="1600" dirty="0"/>
+                  <a:t>depends on previous values at time </a:t>
+                </a:r>
+                <a14:m>
+                  <m:oMath xmlns:m="http://schemas.openxmlformats.org/officeDocument/2006/math">
+                    <m:r>
+                      <a:rPr lang="en-GB" sz="1600" i="1" dirty="0" smtClean="0">
+                        <a:latin typeface="Cambria Math" panose="02040503050406030204" pitchFamily="18" charset="0"/>
+                      </a:rPr>
+                      <m:t>𝑛</m:t>
+                    </m:r>
+                  </m:oMath>
+                </a14:m>
+                <a:r>
+                  <a:rPr lang="en-GB" sz="1600" dirty="0"/>
+                  <a:t> at the points</a:t>
+                </a:r>
+                <a14:m>
+                  <m:oMath xmlns:m="http://schemas.openxmlformats.org/officeDocument/2006/math">
+                    <m:r>
+                      <a:rPr lang="en-GB" sz="1600" i="1" dirty="0" smtClean="0">
+                        <a:latin typeface="Cambria Math" panose="02040503050406030204" pitchFamily="18" charset="0"/>
+                      </a:rPr>
+                      <m:t> (</m:t>
+                    </m:r>
+                    <m:r>
+                      <a:rPr lang="en-GB" sz="1600" i="1" dirty="0" err="1">
+                        <a:latin typeface="Cambria Math" panose="02040503050406030204" pitchFamily="18" charset="0"/>
+                      </a:rPr>
+                      <m:t>𝑖</m:t>
+                    </m:r>
+                    <m:r>
+                      <a:rPr lang="en-GB" sz="1600" i="1" dirty="0" err="1">
+                        <a:latin typeface="Cambria Math" panose="02040503050406030204" pitchFamily="18" charset="0"/>
+                      </a:rPr>
+                      <m:t>,</m:t>
+                    </m:r>
+                    <m:r>
+                      <a:rPr lang="en-GB" sz="1600" i="1" dirty="0" err="1">
+                        <a:latin typeface="Cambria Math" panose="02040503050406030204" pitchFamily="18" charset="0"/>
+                      </a:rPr>
+                      <m:t>𝑗</m:t>
+                    </m:r>
+                    <m:r>
+                      <a:rPr lang="en-GB" sz="1600" i="1" dirty="0">
+                        <a:latin typeface="Cambria Math" panose="02040503050406030204" pitchFamily="18" charset="0"/>
+                      </a:rPr>
+                      <m:t>) </m:t>
+                    </m:r>
+                  </m:oMath>
+                </a14:m>
+                <a:r>
+                  <a:rPr lang="en-GB" sz="1600" dirty="0"/>
+                  <a:t>itself and the fourth surrounding points </a:t>
+                </a:r>
+                <a14:m>
+                  <m:oMath xmlns:m="http://schemas.openxmlformats.org/officeDocument/2006/math">
+                    <m:r>
+                      <a:rPr lang="en-GB" sz="1600" i="1" dirty="0" smtClean="0">
+                        <a:latin typeface="Cambria Math" panose="02040503050406030204" pitchFamily="18" charset="0"/>
+                      </a:rPr>
+                      <m:t>(</m:t>
+                    </m:r>
+                    <m:r>
+                      <a:rPr lang="en-GB" sz="1600" i="1" dirty="0" smtClean="0">
+                        <a:latin typeface="Cambria Math" panose="02040503050406030204" pitchFamily="18" charset="0"/>
+                      </a:rPr>
+                      <m:t>𝑖</m:t>
+                    </m:r>
+                    <m:r>
+                      <a:rPr lang="en-GB" sz="1600" i="1" dirty="0" smtClean="0">
+                        <a:latin typeface="Cambria Math" panose="02040503050406030204" pitchFamily="18" charset="0"/>
+                      </a:rPr>
+                      <m:t>−1,</m:t>
+                    </m:r>
+                    <m:r>
+                      <a:rPr lang="en-GB" sz="1600" i="1" dirty="0" smtClean="0">
+                        <a:latin typeface="Cambria Math" panose="02040503050406030204" pitchFamily="18" charset="0"/>
+                      </a:rPr>
+                      <m:t>𝑗</m:t>
+                    </m:r>
+                    <m:r>
+                      <a:rPr lang="en-GB" sz="1600" i="1" dirty="0" smtClean="0">
+                        <a:latin typeface="Cambria Math" panose="02040503050406030204" pitchFamily="18" charset="0"/>
+                      </a:rPr>
+                      <m:t>), (</m:t>
+                    </m:r>
+                    <m:r>
+                      <a:rPr lang="en-GB" sz="1600" i="1" dirty="0" smtClean="0">
+                        <a:latin typeface="Cambria Math" panose="02040503050406030204" pitchFamily="18" charset="0"/>
+                      </a:rPr>
+                      <m:t>𝑖</m:t>
+                    </m:r>
+                    <m:r>
+                      <a:rPr lang="en-GB" sz="1600" i="1" dirty="0" smtClean="0">
+                        <a:latin typeface="Cambria Math" panose="02040503050406030204" pitchFamily="18" charset="0"/>
+                      </a:rPr>
+                      <m:t>+1,</m:t>
+                    </m:r>
+                    <m:r>
+                      <a:rPr lang="en-GB" sz="1600" i="1" dirty="0" smtClean="0">
+                        <a:latin typeface="Cambria Math" panose="02040503050406030204" pitchFamily="18" charset="0"/>
+                      </a:rPr>
+                      <m:t>𝑗</m:t>
+                    </m:r>
+                    <m:r>
+                      <a:rPr lang="en-GB" sz="1600" i="1" dirty="0" smtClean="0">
+                        <a:latin typeface="Cambria Math" panose="02040503050406030204" pitchFamily="18" charset="0"/>
+                      </a:rPr>
+                      <m:t>), (</m:t>
+                    </m:r>
+                    <m:r>
+                      <a:rPr lang="en-GB" sz="1600" i="1" dirty="0" smtClean="0">
+                        <a:latin typeface="Cambria Math" panose="02040503050406030204" pitchFamily="18" charset="0"/>
+                      </a:rPr>
+                      <m:t>𝑖</m:t>
+                    </m:r>
+                    <m:r>
+                      <a:rPr lang="en-GB" sz="1600" i="1" dirty="0" smtClean="0">
+                        <a:latin typeface="Cambria Math" panose="02040503050406030204" pitchFamily="18" charset="0"/>
+                      </a:rPr>
+                      <m:t>,</m:t>
+                    </m:r>
+                    <m:r>
+                      <a:rPr lang="en-GB" sz="1600" i="1" dirty="0" smtClean="0">
+                        <a:latin typeface="Cambria Math" panose="02040503050406030204" pitchFamily="18" charset="0"/>
+                      </a:rPr>
+                      <m:t>𝑗</m:t>
+                    </m:r>
+                    <m:r>
+                      <a:rPr lang="en-GB" sz="1600" i="1" dirty="0" smtClean="0">
+                        <a:latin typeface="Cambria Math" panose="02040503050406030204" pitchFamily="18" charset="0"/>
+                      </a:rPr>
+                      <m:t>−1) </m:t>
+                    </m:r>
+                  </m:oMath>
+                </a14:m>
+                <a:r>
+                  <a:rPr lang="en-GB" sz="1600" dirty="0"/>
+                  <a:t>and</a:t>
+                </a:r>
+                <a14:m>
+                  <m:oMath xmlns:m="http://schemas.openxmlformats.org/officeDocument/2006/math">
+                    <m:r>
+                      <a:rPr lang="en-GB" sz="1600" i="1" dirty="0" smtClean="0">
+                        <a:latin typeface="Cambria Math" panose="02040503050406030204" pitchFamily="18" charset="0"/>
+                      </a:rPr>
+                      <m:t> (</m:t>
+                    </m:r>
+                    <m:r>
+                      <a:rPr lang="en-GB" sz="1600" i="1" dirty="0" smtClean="0">
+                        <a:latin typeface="Cambria Math" panose="02040503050406030204" pitchFamily="18" charset="0"/>
+                      </a:rPr>
+                      <m:t>𝑖</m:t>
+                    </m:r>
+                    <m:r>
+                      <a:rPr lang="en-GB" sz="1600" i="1" dirty="0" smtClean="0">
+                        <a:latin typeface="Cambria Math" panose="02040503050406030204" pitchFamily="18" charset="0"/>
+                      </a:rPr>
+                      <m:t>,</m:t>
+                    </m:r>
+                    <m:r>
+                      <a:rPr lang="en-GB" sz="1600" i="1" dirty="0" smtClean="0">
+                        <a:latin typeface="Cambria Math" panose="02040503050406030204" pitchFamily="18" charset="0"/>
+                      </a:rPr>
+                      <m:t>𝑗</m:t>
+                    </m:r>
+                    <m:r>
+                      <a:rPr lang="en-GB" sz="1600" i="1" dirty="0" smtClean="0">
+                        <a:latin typeface="Cambria Math" panose="02040503050406030204" pitchFamily="18" charset="0"/>
+                      </a:rPr>
+                      <m:t>+1).</m:t>
+                    </m:r>
+                  </m:oMath>
+                </a14:m>
+                <a:endParaRPr lang="en-GB" sz="1600" dirty="0"/>
+              </a:p>
+              <a:p>
+                <a:endParaRPr lang="en-GB" dirty="0"/>
+              </a:p>
+            </p:txBody>
+          </p:sp>
+        </mc:Choice>
+        <mc:Fallback>
+          <p:sp>
+            <p:nvSpPr>
+              <p:cNvPr id="9" name="CasellaDiTesto 8">
+                <a:extLst>
+                  <a:ext uri="{FF2B5EF4-FFF2-40B4-BE49-F238E27FC236}">
+                    <a16:creationId xmlns:a16="http://schemas.microsoft.com/office/drawing/2014/main" id="{9506BEA2-29F2-51B7-1753-DAB1580ED382}"/>
+                  </a:ext>
+                </a:extLst>
+              </p:cNvPr>
+              <p:cNvSpPr txBox="1">
+                <a:spLocks noRot="1" noChangeAspect="1" noMove="1" noResize="1" noEditPoints="1" noAdjustHandles="1" noChangeArrowheads="1" noChangeShapeType="1" noTextEdit="1"/>
+              </p:cNvSpPr>
+              <p:nvPr/>
+            </p:nvSpPr>
+            <p:spPr>
+              <a:xfrm>
+                <a:off x="1024088" y="4358403"/>
+                <a:ext cx="5071912" cy="1846659"/>
+              </a:xfrm>
+              <a:prstGeom prst="rect">
+                <a:avLst/>
+              </a:prstGeom>
+              <a:blipFill>
+                <a:blip r:embed="rId5"/>
+                <a:stretch>
+                  <a:fillRect l="-481" t="-990"/>
+                </a:stretch>
+              </a:blipFill>
+            </p:spPr>
+            <p:txBody>
+              <a:bodyPr/>
+              <a:lstStyle/>
+              <a:p>
+                <a:r>
+                  <a:rPr lang="en-GB">
+                    <a:noFill/>
+                  </a:rPr>
+                  <a:t> </a:t>
+                </a:r>
+              </a:p>
+            </p:txBody>
+          </p:sp>
+        </mc:Fallback>
+      </mc:AlternateContent>
+      <p:sp>
+        <p:nvSpPr>
+          <p:cNvPr id="10" name="CasellaDiTesto 9">
+            <a:extLst>
+              <a:ext uri="{FF2B5EF4-FFF2-40B4-BE49-F238E27FC236}">
+                <a16:creationId xmlns:a16="http://schemas.microsoft.com/office/drawing/2014/main" id="{0CD2B68D-EDE9-35D6-A45B-3843DABAF436}"/>
+              </a:ext>
+            </a:extLst>
+          </p:cNvPr>
+          <p:cNvSpPr txBox="1"/>
+          <p:nvPr/>
+        </p:nvSpPr>
+        <p:spPr>
+          <a:xfrm>
+            <a:off x="2926505" y="2526468"/>
+            <a:ext cx="4342812" cy="584775"/>
+          </a:xfrm>
+          <a:prstGeom prst="rect">
+            <a:avLst/>
+          </a:prstGeom>
+          <a:noFill/>
+        </p:spPr>
+        <p:txBody>
+          <a:bodyPr wrap="square" rtlCol="0">
+            <a:spAutoFit/>
+          </a:bodyPr>
+          <a:lstStyle/>
+          <a:p>
+            <a:r>
+              <a:rPr lang="en-GB" sz="1600" dirty="0"/>
+              <a:t>Time discretization: forward Euler method </a:t>
+            </a:r>
+          </a:p>
+          <a:p>
+            <a:r>
+              <a:rPr lang="en-GB" sz="1600" dirty="0"/>
+              <a:t>Space discretization: central finite differences</a:t>
+            </a:r>
+          </a:p>
+        </p:txBody>
+      </p:sp>
+      <p:sp>
+        <p:nvSpPr>
+          <p:cNvPr id="11" name="Freccia in giù 10">
+            <a:extLst>
+              <a:ext uri="{FF2B5EF4-FFF2-40B4-BE49-F238E27FC236}">
+                <a16:creationId xmlns:a16="http://schemas.microsoft.com/office/drawing/2014/main" id="{EA581CFE-5398-43F0-DCDD-6BA5DD618940}"/>
+              </a:ext>
+            </a:extLst>
+          </p:cNvPr>
+          <p:cNvSpPr/>
+          <p:nvPr/>
+        </p:nvSpPr>
+        <p:spPr>
+          <a:xfrm>
+            <a:off x="2007130" y="2380225"/>
+            <a:ext cx="524504" cy="1048775"/>
+          </a:xfrm>
+          <a:prstGeom prst="downArrow">
+            <a:avLst/>
+          </a:prstGeom>
+          <a:noFill/>
+        </p:spPr>
+        <p:style>
+          <a:lnRef idx="2">
+            <a:schemeClr val="accent1">
+              <a:shade val="15000"/>
+            </a:schemeClr>
+          </a:lnRef>
+          <a:fillRef idx="1">
+            <a:schemeClr val="accent1"/>
+          </a:fillRef>
+          <a:effectRef idx="0">
+            <a:schemeClr val="accent1"/>
+          </a:effectRef>
+          <a:fontRef idx="minor">
+            <a:schemeClr val="lt1"/>
+          </a:fontRef>
+        </p:style>
+        <p:txBody>
+          <a:bodyPr rtlCol="0" anchor="ctr"/>
+          <a:lstStyle/>
+          <a:p>
+            <a:pPr algn="ctr"/>
+            <a:endParaRPr lang="en-GB"/>
+          </a:p>
+        </p:txBody>
+      </p:sp>
+      <p:sp>
+        <p:nvSpPr>
+          <p:cNvPr id="12" name="CasellaDiTesto 11">
+            <a:extLst>
+              <a:ext uri="{FF2B5EF4-FFF2-40B4-BE49-F238E27FC236}">
+                <a16:creationId xmlns:a16="http://schemas.microsoft.com/office/drawing/2014/main" id="{51CBAC42-7665-2B57-98B5-7BF0044BCDD4}"/>
+              </a:ext>
+            </a:extLst>
+          </p:cNvPr>
+          <p:cNvSpPr txBox="1"/>
+          <p:nvPr/>
+        </p:nvSpPr>
+        <p:spPr>
+          <a:xfrm>
+            <a:off x="7004078" y="5591844"/>
+            <a:ext cx="5338916" cy="1323439"/>
+          </a:xfrm>
+          <a:prstGeom prst="rect">
+            <a:avLst/>
+          </a:prstGeom>
+          <a:noFill/>
+        </p:spPr>
+        <p:txBody>
+          <a:bodyPr wrap="square" rtlCol="0">
+            <a:spAutoFit/>
+          </a:bodyPr>
+          <a:lstStyle/>
+          <a:p>
+            <a:r>
+              <a:rPr lang="en-GB" sz="1100" dirty="0"/>
+              <a:t>Picture taken from </a:t>
+            </a:r>
+            <a:r>
+              <a:rPr lang="en-GB" sz="1100" i="1" dirty="0"/>
+              <a:t>Sharma, Mittra,  A finite‐difference‐based technique for numerically efficient computation of capacitance matrices for 2‐dimensional multi‐conductor problems involving thin dielectric coating, </a:t>
+            </a:r>
+            <a:r>
+              <a:rPr lang="en-GB" sz="1100" dirty="0"/>
+              <a:t>June 2024 </a:t>
+            </a:r>
+            <a:r>
+              <a:rPr lang="en-GB" sz="1100" u="sng" dirty="0">
+                <a:hlinkClick r:id="rId6"/>
+              </a:rPr>
+              <a:t>International Journal of Numerical Modelling Electronic Networks Devices and Fields</a:t>
+            </a:r>
+            <a:r>
+              <a:rPr lang="en-GB" sz="1100" dirty="0"/>
+              <a:t> 37(4)</a:t>
+            </a:r>
+          </a:p>
+          <a:p>
+            <a:endParaRPr lang="en-GB" i="1" dirty="0"/>
+          </a:p>
+          <a:p>
+            <a:endParaRPr lang="en-GB" dirty="0"/>
           </a:p>
         </p:txBody>
       </p:sp>
@@ -3713,6 +5599,401 @@
     <p:extLst>
       <p:ext uri="{BB962C8B-B14F-4D97-AF65-F5344CB8AC3E}">
         <p14:creationId xmlns:p14="http://schemas.microsoft.com/office/powerpoint/2010/main" val="2084964788"/>
+      </p:ext>
+    </p:extLst>
+  </p:cSld>
+  <p:clrMapOvr>
+    <a:masterClrMapping/>
+  </p:clrMapOvr>
+</p:sld>
+</file>
+
+<file path=ppt/slides/slide4.xml><?xml version="1.0" encoding="utf-8"?>
+<p:sld xmlns:a="http://schemas.openxmlformats.org/drawingml/2006/main" xmlns:r="http://schemas.openxmlformats.org/officeDocument/2006/relationships" xmlns:p="http://schemas.openxmlformats.org/presentationml/2006/main">
+  <p:cSld>
+    <p:spTree>
+      <p:nvGrpSpPr>
+        <p:cNvPr id="1" name=""/>
+        <p:cNvGrpSpPr/>
+        <p:nvPr/>
+      </p:nvGrpSpPr>
+      <p:grpSpPr>
+        <a:xfrm>
+          <a:off x="0" y="0"/>
+          <a:ext cx="0" cy="0"/>
+          <a:chOff x="0" y="0"/>
+          <a:chExt cx="0" cy="0"/>
+        </a:xfrm>
+      </p:grpSpPr>
+      <p:sp>
+        <p:nvSpPr>
+          <p:cNvPr id="2" name="CasellaDiTesto 1">
+            <a:extLst>
+              <a:ext uri="{FF2B5EF4-FFF2-40B4-BE49-F238E27FC236}">
+                <a16:creationId xmlns:a16="http://schemas.microsoft.com/office/drawing/2014/main" id="{9326DD3C-A757-2B18-B992-372F4EA69D8E}"/>
+              </a:ext>
+            </a:extLst>
+          </p:cNvPr>
+          <p:cNvSpPr txBox="1"/>
+          <p:nvPr/>
+        </p:nvSpPr>
+        <p:spPr>
+          <a:xfrm>
+            <a:off x="2340077" y="678425"/>
+            <a:ext cx="7511845" cy="461665"/>
+          </a:xfrm>
+          <a:prstGeom prst="rect">
+            <a:avLst/>
+          </a:prstGeom>
+          <a:noFill/>
+        </p:spPr>
+        <p:txBody>
+          <a:bodyPr wrap="square" rtlCol="0">
+            <a:spAutoFit/>
+          </a:bodyPr>
+          <a:lstStyle/>
+          <a:p>
+            <a:pPr algn="ctr"/>
+            <a:r>
+              <a:rPr lang="en-GB" sz="2400" dirty="0"/>
+              <a:t>MPI – domain decomposition and memory allocation</a:t>
+            </a:r>
+          </a:p>
+        </p:txBody>
+      </p:sp>
+    </p:spTree>
+    <p:extLst>
+      <p:ext uri="{BB962C8B-B14F-4D97-AF65-F5344CB8AC3E}">
+        <p14:creationId xmlns:p14="http://schemas.microsoft.com/office/powerpoint/2010/main" val="2438490258"/>
+      </p:ext>
+    </p:extLst>
+  </p:cSld>
+  <p:clrMapOvr>
+    <a:masterClrMapping/>
+  </p:clrMapOvr>
+</p:sld>
+</file>
+
+<file path=ppt/slides/slide5.xml><?xml version="1.0" encoding="utf-8"?>
+<p:sld xmlns:a="http://schemas.openxmlformats.org/drawingml/2006/main" xmlns:r="http://schemas.openxmlformats.org/officeDocument/2006/relationships" xmlns:p="http://schemas.openxmlformats.org/presentationml/2006/main">
+  <p:cSld>
+    <p:spTree>
+      <p:nvGrpSpPr>
+        <p:cNvPr id="1" name=""/>
+        <p:cNvGrpSpPr/>
+        <p:nvPr/>
+      </p:nvGrpSpPr>
+      <p:grpSpPr>
+        <a:xfrm>
+          <a:off x="0" y="0"/>
+          <a:ext cx="0" cy="0"/>
+          <a:chOff x="0" y="0"/>
+          <a:chExt cx="0" cy="0"/>
+        </a:xfrm>
+      </p:grpSpPr>
+      <p:sp>
+        <p:nvSpPr>
+          <p:cNvPr id="3" name="CasellaDiTesto 2">
+            <a:extLst>
+              <a:ext uri="{FF2B5EF4-FFF2-40B4-BE49-F238E27FC236}">
+                <a16:creationId xmlns:a16="http://schemas.microsoft.com/office/drawing/2014/main" id="{E2FE88C3-81AF-591F-34CE-BEA06465B10F}"/>
+              </a:ext>
+            </a:extLst>
+          </p:cNvPr>
+          <p:cNvSpPr txBox="1"/>
+          <p:nvPr/>
+        </p:nvSpPr>
+        <p:spPr>
+          <a:xfrm>
+            <a:off x="3411793" y="717755"/>
+            <a:ext cx="5368413" cy="523220"/>
+          </a:xfrm>
+          <a:prstGeom prst="rect">
+            <a:avLst/>
+          </a:prstGeom>
+          <a:noFill/>
+        </p:spPr>
+        <p:txBody>
+          <a:bodyPr wrap="square" rtlCol="0">
+            <a:spAutoFit/>
+          </a:bodyPr>
+          <a:lstStyle/>
+          <a:p>
+            <a:pPr algn="ctr"/>
+            <a:r>
+              <a:rPr lang="en-GB" sz="2800" dirty="0"/>
+              <a:t>MPI – parallelization </a:t>
+            </a:r>
+          </a:p>
+        </p:txBody>
+      </p:sp>
+    </p:spTree>
+    <p:extLst>
+      <p:ext uri="{BB962C8B-B14F-4D97-AF65-F5344CB8AC3E}">
+        <p14:creationId xmlns:p14="http://schemas.microsoft.com/office/powerpoint/2010/main" val="4118766272"/>
+      </p:ext>
+    </p:extLst>
+  </p:cSld>
+  <p:clrMapOvr>
+    <a:masterClrMapping/>
+  </p:clrMapOvr>
+</p:sld>
+</file>
+
+<file path=ppt/slides/slide6.xml><?xml version="1.0" encoding="utf-8"?>
+<p:sld xmlns:a="http://schemas.openxmlformats.org/drawingml/2006/main" xmlns:r="http://schemas.openxmlformats.org/officeDocument/2006/relationships" xmlns:p="http://schemas.openxmlformats.org/presentationml/2006/main">
+  <p:cSld>
+    <p:spTree>
+      <p:nvGrpSpPr>
+        <p:cNvPr id="1" name=""/>
+        <p:cNvGrpSpPr/>
+        <p:nvPr/>
+      </p:nvGrpSpPr>
+      <p:grpSpPr>
+        <a:xfrm>
+          <a:off x="0" y="0"/>
+          <a:ext cx="0" cy="0"/>
+          <a:chOff x="0" y="0"/>
+          <a:chExt cx="0" cy="0"/>
+        </a:xfrm>
+      </p:grpSpPr>
+      <p:sp>
+        <p:nvSpPr>
+          <p:cNvPr id="2" name="CasellaDiTesto 1">
+            <a:extLst>
+              <a:ext uri="{FF2B5EF4-FFF2-40B4-BE49-F238E27FC236}">
+                <a16:creationId xmlns:a16="http://schemas.microsoft.com/office/drawing/2014/main" id="{19FA6C07-AA68-F484-D516-756BE2B59B7E}"/>
+              </a:ext>
+            </a:extLst>
+          </p:cNvPr>
+          <p:cNvSpPr txBox="1"/>
+          <p:nvPr/>
+        </p:nvSpPr>
+        <p:spPr>
+          <a:xfrm>
+            <a:off x="3991897" y="589935"/>
+            <a:ext cx="4522838" cy="461665"/>
+          </a:xfrm>
+          <a:prstGeom prst="rect">
+            <a:avLst/>
+          </a:prstGeom>
+          <a:noFill/>
+        </p:spPr>
+        <p:txBody>
+          <a:bodyPr wrap="square" rtlCol="0">
+            <a:spAutoFit/>
+          </a:bodyPr>
+          <a:lstStyle/>
+          <a:p>
+            <a:pPr algn="ctr"/>
+            <a:r>
+              <a:rPr lang="en-GB" sz="2400" dirty="0"/>
+              <a:t>OpenMP – parallelization </a:t>
+            </a:r>
+          </a:p>
+        </p:txBody>
+      </p:sp>
+    </p:spTree>
+    <p:extLst>
+      <p:ext uri="{BB962C8B-B14F-4D97-AF65-F5344CB8AC3E}">
+        <p14:creationId xmlns:p14="http://schemas.microsoft.com/office/powerpoint/2010/main" val="1930270046"/>
+      </p:ext>
+    </p:extLst>
+  </p:cSld>
+  <p:clrMapOvr>
+    <a:masterClrMapping/>
+  </p:clrMapOvr>
+</p:sld>
+</file>
+
+<file path=ppt/slides/slide7.xml><?xml version="1.0" encoding="utf-8"?>
+<p:sld xmlns:a="http://schemas.openxmlformats.org/drawingml/2006/main" xmlns:r="http://schemas.openxmlformats.org/officeDocument/2006/relationships" xmlns:p="http://schemas.openxmlformats.org/presentationml/2006/main">
+  <p:cSld>
+    <p:spTree>
+      <p:nvGrpSpPr>
+        <p:cNvPr id="1" name=""/>
+        <p:cNvGrpSpPr/>
+        <p:nvPr/>
+      </p:nvGrpSpPr>
+      <p:grpSpPr>
+        <a:xfrm>
+          <a:off x="0" y="0"/>
+          <a:ext cx="0" cy="0"/>
+          <a:chOff x="0" y="0"/>
+          <a:chExt cx="0" cy="0"/>
+        </a:xfrm>
+      </p:grpSpPr>
+      <p:sp>
+        <p:nvSpPr>
+          <p:cNvPr id="2" name="CasellaDiTesto 1">
+            <a:extLst>
+              <a:ext uri="{FF2B5EF4-FFF2-40B4-BE49-F238E27FC236}">
+                <a16:creationId xmlns:a16="http://schemas.microsoft.com/office/drawing/2014/main" id="{AE5248CA-2591-12DE-E146-20F27DDB20A1}"/>
+              </a:ext>
+            </a:extLst>
+          </p:cNvPr>
+          <p:cNvSpPr txBox="1"/>
+          <p:nvPr/>
+        </p:nvSpPr>
+        <p:spPr>
+          <a:xfrm>
+            <a:off x="4050891" y="609600"/>
+            <a:ext cx="3460954" cy="461665"/>
+          </a:xfrm>
+          <a:prstGeom prst="rect">
+            <a:avLst/>
+          </a:prstGeom>
+          <a:noFill/>
+        </p:spPr>
+        <p:txBody>
+          <a:bodyPr wrap="square" rtlCol="0">
+            <a:spAutoFit/>
+          </a:bodyPr>
+          <a:lstStyle/>
+          <a:p>
+            <a:r>
+              <a:rPr lang="en-GB" sz="2400" dirty="0"/>
+              <a:t>Input size for the tests</a:t>
+            </a:r>
+          </a:p>
+        </p:txBody>
+      </p:sp>
+    </p:spTree>
+    <p:extLst>
+      <p:ext uri="{BB962C8B-B14F-4D97-AF65-F5344CB8AC3E}">
+        <p14:creationId xmlns:p14="http://schemas.microsoft.com/office/powerpoint/2010/main" val="3992946500"/>
+      </p:ext>
+    </p:extLst>
+  </p:cSld>
+  <p:clrMapOvr>
+    <a:masterClrMapping/>
+  </p:clrMapOvr>
+</p:sld>
+</file>
+
+<file path=ppt/slides/slide8.xml><?xml version="1.0" encoding="utf-8"?>
+<p:sld xmlns:a="http://schemas.openxmlformats.org/drawingml/2006/main" xmlns:r="http://schemas.openxmlformats.org/officeDocument/2006/relationships" xmlns:p="http://schemas.openxmlformats.org/presentationml/2006/main">
+  <p:cSld>
+    <p:spTree>
+      <p:nvGrpSpPr>
+        <p:cNvPr id="1" name=""/>
+        <p:cNvGrpSpPr/>
+        <p:nvPr/>
+      </p:nvGrpSpPr>
+      <p:grpSpPr>
+        <a:xfrm>
+          <a:off x="0" y="0"/>
+          <a:ext cx="0" cy="0"/>
+          <a:chOff x="0" y="0"/>
+          <a:chExt cx="0" cy="0"/>
+        </a:xfrm>
+      </p:grpSpPr>
+      <p:sp>
+        <p:nvSpPr>
+          <p:cNvPr id="2" name="CasellaDiTesto 1">
+            <a:extLst>
+              <a:ext uri="{FF2B5EF4-FFF2-40B4-BE49-F238E27FC236}">
+                <a16:creationId xmlns:a16="http://schemas.microsoft.com/office/drawing/2014/main" id="{CAFD91E4-598B-2D44-9F7E-14CD1D1CB2A4}"/>
+              </a:ext>
+            </a:extLst>
+          </p:cNvPr>
+          <p:cNvSpPr txBox="1"/>
+          <p:nvPr/>
+        </p:nvSpPr>
+        <p:spPr>
+          <a:xfrm>
+            <a:off x="4011560" y="825909"/>
+            <a:ext cx="4296698" cy="523220"/>
+          </a:xfrm>
+          <a:prstGeom prst="rect">
+            <a:avLst/>
+          </a:prstGeom>
+          <a:noFill/>
+        </p:spPr>
+        <p:txBody>
+          <a:bodyPr wrap="square" rtlCol="0">
+            <a:spAutoFit/>
+          </a:bodyPr>
+          <a:lstStyle/>
+          <a:p>
+            <a:pPr algn="ctr"/>
+            <a:r>
+              <a:rPr lang="en-GB" sz="2800" dirty="0"/>
+              <a:t>Multithread scaling</a:t>
+            </a:r>
+          </a:p>
+        </p:txBody>
+      </p:sp>
+    </p:spTree>
+    <p:extLst>
+      <p:ext uri="{BB962C8B-B14F-4D97-AF65-F5344CB8AC3E}">
+        <p14:creationId xmlns:p14="http://schemas.microsoft.com/office/powerpoint/2010/main" val="2070378430"/>
+      </p:ext>
+    </p:extLst>
+  </p:cSld>
+  <p:clrMapOvr>
+    <a:masterClrMapping/>
+  </p:clrMapOvr>
+</p:sld>
+</file>
+
+<file path=ppt/slides/slide9.xml><?xml version="1.0" encoding="utf-8"?>
+<p:sld xmlns:a="http://schemas.openxmlformats.org/drawingml/2006/main" xmlns:r="http://schemas.openxmlformats.org/officeDocument/2006/relationships" xmlns:p="http://schemas.openxmlformats.org/presentationml/2006/main">
+  <p:cSld>
+    <p:spTree>
+      <p:nvGrpSpPr>
+        <p:cNvPr id="1" name=""/>
+        <p:cNvGrpSpPr/>
+        <p:nvPr/>
+      </p:nvGrpSpPr>
+      <p:grpSpPr>
+        <a:xfrm>
+          <a:off x="0" y="0"/>
+          <a:ext cx="0" cy="0"/>
+          <a:chOff x="0" y="0"/>
+          <a:chExt cx="0" cy="0"/>
+        </a:xfrm>
+      </p:grpSpPr>
+      <p:sp>
+        <p:nvSpPr>
+          <p:cNvPr id="2" name="CasellaDiTesto 1">
+            <a:extLst>
+              <a:ext uri="{FF2B5EF4-FFF2-40B4-BE49-F238E27FC236}">
+                <a16:creationId xmlns:a16="http://schemas.microsoft.com/office/drawing/2014/main" id="{4DBB555B-83BD-F59F-825A-993045AD612D}"/>
+              </a:ext>
+            </a:extLst>
+          </p:cNvPr>
+          <p:cNvSpPr txBox="1"/>
+          <p:nvPr/>
+        </p:nvSpPr>
+        <p:spPr>
+          <a:xfrm>
+            <a:off x="2969342" y="776748"/>
+            <a:ext cx="4984955" cy="523220"/>
+          </a:xfrm>
+          <a:prstGeom prst="rect">
+            <a:avLst/>
+          </a:prstGeom>
+          <a:noFill/>
+        </p:spPr>
+        <p:txBody>
+          <a:bodyPr wrap="square" rtlCol="0">
+            <a:spAutoFit/>
+          </a:bodyPr>
+          <a:lstStyle/>
+          <a:p>
+            <a:pPr algn="ctr"/>
+            <a:r>
+              <a:rPr lang="en-GB" sz="2800" dirty="0"/>
+              <a:t>Strong scaling</a:t>
+            </a:r>
+          </a:p>
+        </p:txBody>
+      </p:sp>
+    </p:spTree>
+    <p:extLst>
+      <p:ext uri="{BB962C8B-B14F-4D97-AF65-F5344CB8AC3E}">
+        <p14:creationId xmlns:p14="http://schemas.microsoft.com/office/powerpoint/2010/main" val="3621767326"/>
       </p:ext>
     </p:extLst>
   </p:cSld>
@@ -4035,4 +6316,319 @@
     </a:ext>
   </a:extLst>
 </a:theme>
+</file>
+
+<file path=ppt/theme/theme2.xml><?xml version="1.0" encoding="utf-8"?>
+<a:theme xmlns:a="http://schemas.openxmlformats.org/drawingml/2006/main" name="Tema di Office">
+  <a:themeElements>
+    <a:clrScheme name="Office">
+      <a:dk1>
+        <a:sysClr val="windowText" lastClr="000000"/>
+      </a:dk1>
+      <a:lt1>
+        <a:sysClr val="window" lastClr="FFFFFF"/>
+      </a:lt1>
+      <a:dk2>
+        <a:srgbClr val="0E2841"/>
+      </a:dk2>
+      <a:lt2>
+        <a:srgbClr val="E8E8E8"/>
+      </a:lt2>
+      <a:accent1>
+        <a:srgbClr val="156082"/>
+      </a:accent1>
+      <a:accent2>
+        <a:srgbClr val="E97132"/>
+      </a:accent2>
+      <a:accent3>
+        <a:srgbClr val="196B24"/>
+      </a:accent3>
+      <a:accent4>
+        <a:srgbClr val="0F9ED5"/>
+      </a:accent4>
+      <a:accent5>
+        <a:srgbClr val="A02B93"/>
+      </a:accent5>
+      <a:accent6>
+        <a:srgbClr val="4EA72E"/>
+      </a:accent6>
+      <a:hlink>
+        <a:srgbClr val="467886"/>
+      </a:hlink>
+      <a:folHlink>
+        <a:srgbClr val="96607D"/>
+      </a:folHlink>
+    </a:clrScheme>
+    <a:fontScheme name="Office">
+      <a:majorFont>
+        <a:latin typeface="Aptos Display" panose="02110004020202020204"/>
+        <a:ea typeface=""/>
+        <a:cs typeface=""/>
+        <a:font script="Jpan" typeface="游ゴシック Light"/>
+        <a:font script="Hang" typeface="맑은 고딕"/>
+        <a:font script="Hans" typeface="等线 Light"/>
+        <a:font script="Hant" typeface="新細明體"/>
+        <a:font script="Arab" typeface="Times New Roman"/>
+        <a:font script="Hebr" typeface="Times New Roman"/>
+        <a:font script="Thai" typeface="Angsana New"/>
+        <a:font script="Ethi" typeface="Nyala"/>
+        <a:font script="Beng" typeface="Vrinda"/>
+        <a:font script="Gujr" typeface="Shruti"/>
+        <a:font script="Khmr" typeface="MoolBoran"/>
+        <a:font script="Knda" typeface="Tunga"/>
+        <a:font script="Guru" typeface="Raavi"/>
+        <a:font script="Cans" typeface="Euphemia"/>
+        <a:font script="Cher" typeface="Plantagenet Cherokee"/>
+        <a:font script="Yiii" typeface="Microsoft Yi Baiti"/>
+        <a:font script="Tibt" typeface="Microsoft Himalaya"/>
+        <a:font script="Thaa" typeface="MV Boli"/>
+        <a:font script="Deva" typeface="Mangal"/>
+        <a:font script="Telu" typeface="Gautami"/>
+        <a:font script="Taml" typeface="Latha"/>
+        <a:font script="Syrc" typeface="Estrangelo Edessa"/>
+        <a:font script="Orya" typeface="Kalinga"/>
+        <a:font script="Mlym" typeface="Kartika"/>
+        <a:font script="Laoo" typeface="DokChampa"/>
+        <a:font script="Sinh" typeface="Iskoola Pota"/>
+        <a:font script="Mong" typeface="Mongolian Baiti"/>
+        <a:font script="Viet" typeface="Times New Roman"/>
+        <a:font script="Uigh" typeface="Microsoft Uighur"/>
+        <a:font script="Geor" typeface="Sylfaen"/>
+        <a:font script="Armn" typeface="Arial"/>
+        <a:font script="Bugi" typeface="Leelawadee UI"/>
+        <a:font script="Bopo" typeface="Microsoft JhengHei"/>
+        <a:font script="Java" typeface="Javanese Text"/>
+        <a:font script="Lisu" typeface="Segoe UI"/>
+        <a:font script="Mymr" typeface="Myanmar Text"/>
+        <a:font script="Nkoo" typeface="Ebrima"/>
+        <a:font script="Olck" typeface="Nirmala UI"/>
+        <a:font script="Osma" typeface="Ebrima"/>
+        <a:font script="Phag" typeface="Phagspa"/>
+        <a:font script="Syrn" typeface="Estrangelo Edessa"/>
+        <a:font script="Syrj" typeface="Estrangelo Edessa"/>
+        <a:font script="Syre" typeface="Estrangelo Edessa"/>
+        <a:font script="Sora" typeface="Nirmala UI"/>
+        <a:font script="Tale" typeface="Microsoft Tai Le"/>
+        <a:font script="Talu" typeface="Microsoft New Tai Lue"/>
+        <a:font script="Tfng" typeface="Ebrima"/>
+      </a:majorFont>
+      <a:minorFont>
+        <a:latin typeface="Aptos" panose="02110004020202020204"/>
+        <a:ea typeface=""/>
+        <a:cs typeface=""/>
+        <a:font script="Jpan" typeface="游ゴシック"/>
+        <a:font script="Hang" typeface="맑은 고딕"/>
+        <a:font script="Hans" typeface="等线"/>
+        <a:font script="Hant" typeface="新細明體"/>
+        <a:font script="Arab" typeface="Arial"/>
+        <a:font script="Hebr" typeface="Arial"/>
+        <a:font script="Thai" typeface="Cordia New"/>
+        <a:font script="Ethi" typeface="Nyala"/>
+        <a:font script="Beng" typeface="Vrinda"/>
+        <a:font script="Gujr" typeface="Shruti"/>
+        <a:font script="Khmr" typeface="DaunPenh"/>
+        <a:font script="Knda" typeface="Tunga"/>
+        <a:font script="Guru" typeface="Raavi"/>
+        <a:font script="Cans" typeface="Euphemia"/>
+        <a:font script="Cher" typeface="Plantagenet Cherokee"/>
+        <a:font script="Yiii" typeface="Microsoft Yi Baiti"/>
+        <a:font script="Tibt" typeface="Microsoft Himalaya"/>
+        <a:font script="Thaa" typeface="MV Boli"/>
+        <a:font script="Deva" typeface="Mangal"/>
+        <a:font script="Telu" typeface="Gautami"/>
+        <a:font script="Taml" typeface="Latha"/>
+        <a:font script="Syrc" typeface="Estrangelo Edessa"/>
+        <a:font script="Orya" typeface="Kalinga"/>
+        <a:font script="Mlym" typeface="Kartika"/>
+        <a:font script="Laoo" typeface="DokChampa"/>
+        <a:font script="Sinh" typeface="Iskoola Pota"/>
+        <a:font script="Mong" typeface="Mongolian Baiti"/>
+        <a:font script="Viet" typeface="Arial"/>
+        <a:font script="Uigh" typeface="Microsoft Uighur"/>
+        <a:font script="Geor" typeface="Sylfaen"/>
+        <a:font script="Armn" typeface="Arial"/>
+        <a:font script="Bugi" typeface="Leelawadee UI"/>
+        <a:font script="Bopo" typeface="Microsoft JhengHei"/>
+        <a:font script="Java" typeface="Javanese Text"/>
+        <a:font script="Lisu" typeface="Segoe UI"/>
+        <a:font script="Mymr" typeface="Myanmar Text"/>
+        <a:font script="Nkoo" typeface="Ebrima"/>
+        <a:font script="Olck" typeface="Nirmala UI"/>
+        <a:font script="Osma" typeface="Ebrima"/>
+        <a:font script="Phag" typeface="Phagspa"/>
+        <a:font script="Syrn" typeface="Estrangelo Edessa"/>
+        <a:font script="Syrj" typeface="Estrangelo Edessa"/>
+        <a:font script="Syre" typeface="Estrangelo Edessa"/>
+        <a:font script="Sora" typeface="Nirmala UI"/>
+        <a:font script="Tale" typeface="Microsoft Tai Le"/>
+        <a:font script="Talu" typeface="Microsoft New Tai Lue"/>
+        <a:font script="Tfng" typeface="Ebrima"/>
+      </a:minorFont>
+    </a:fontScheme>
+    <a:fmtScheme name="Office">
+      <a:fillStyleLst>
+        <a:solidFill>
+          <a:schemeClr val="phClr"/>
+        </a:solidFill>
+        <a:gradFill rotWithShape="1">
+          <a:gsLst>
+            <a:gs pos="0">
+              <a:schemeClr val="phClr">
+                <a:lumMod val="110000"/>
+                <a:satMod val="105000"/>
+                <a:tint val="67000"/>
+              </a:schemeClr>
+            </a:gs>
+            <a:gs pos="50000">
+              <a:schemeClr val="phClr">
+                <a:lumMod val="105000"/>
+                <a:satMod val="103000"/>
+                <a:tint val="73000"/>
+              </a:schemeClr>
+            </a:gs>
+            <a:gs pos="100000">
+              <a:schemeClr val="phClr">
+                <a:lumMod val="105000"/>
+                <a:satMod val="109000"/>
+                <a:tint val="81000"/>
+              </a:schemeClr>
+            </a:gs>
+          </a:gsLst>
+          <a:lin ang="5400000" scaled="0"/>
+        </a:gradFill>
+        <a:gradFill rotWithShape="1">
+          <a:gsLst>
+            <a:gs pos="0">
+              <a:schemeClr val="phClr">
+                <a:satMod val="103000"/>
+                <a:lumMod val="102000"/>
+                <a:tint val="94000"/>
+              </a:schemeClr>
+            </a:gs>
+            <a:gs pos="50000">
+              <a:schemeClr val="phClr">
+                <a:satMod val="110000"/>
+                <a:lumMod val="100000"/>
+                <a:shade val="100000"/>
+              </a:schemeClr>
+            </a:gs>
+            <a:gs pos="100000">
+              <a:schemeClr val="phClr">
+                <a:lumMod val="99000"/>
+                <a:satMod val="120000"/>
+                <a:shade val="78000"/>
+              </a:schemeClr>
+            </a:gs>
+          </a:gsLst>
+          <a:lin ang="5400000" scaled="0"/>
+        </a:gradFill>
+      </a:fillStyleLst>
+      <a:lnStyleLst>
+        <a:ln w="12700" cap="flat" cmpd="sng" algn="ctr">
+          <a:solidFill>
+            <a:schemeClr val="phClr"/>
+          </a:solidFill>
+          <a:prstDash val="solid"/>
+          <a:miter lim="800000"/>
+        </a:ln>
+        <a:ln w="19050" cap="flat" cmpd="sng" algn="ctr">
+          <a:solidFill>
+            <a:schemeClr val="phClr"/>
+          </a:solidFill>
+          <a:prstDash val="solid"/>
+          <a:miter lim="800000"/>
+        </a:ln>
+        <a:ln w="25400" cap="flat" cmpd="sng" algn="ctr">
+          <a:solidFill>
+            <a:schemeClr val="phClr"/>
+          </a:solidFill>
+          <a:prstDash val="solid"/>
+          <a:miter lim="800000"/>
+        </a:ln>
+      </a:lnStyleLst>
+      <a:effectStyleLst>
+        <a:effectStyle>
+          <a:effectLst/>
+        </a:effectStyle>
+        <a:effectStyle>
+          <a:effectLst/>
+        </a:effectStyle>
+        <a:effectStyle>
+          <a:effectLst>
+            <a:outerShdw blurRad="57150" dist="19050" dir="5400000" algn="ctr" rotWithShape="0">
+              <a:srgbClr val="000000">
+                <a:alpha val="63000"/>
+              </a:srgbClr>
+            </a:outerShdw>
+          </a:effectLst>
+        </a:effectStyle>
+      </a:effectStyleLst>
+      <a:bgFillStyleLst>
+        <a:solidFill>
+          <a:schemeClr val="phClr"/>
+        </a:solidFill>
+        <a:solidFill>
+          <a:schemeClr val="phClr">
+            <a:tint val="95000"/>
+            <a:satMod val="170000"/>
+          </a:schemeClr>
+        </a:solidFill>
+        <a:gradFill rotWithShape="1">
+          <a:gsLst>
+            <a:gs pos="0">
+              <a:schemeClr val="phClr">
+                <a:tint val="93000"/>
+                <a:satMod val="150000"/>
+                <a:shade val="98000"/>
+                <a:lumMod val="102000"/>
+              </a:schemeClr>
+            </a:gs>
+            <a:gs pos="50000">
+              <a:schemeClr val="phClr">
+                <a:tint val="98000"/>
+                <a:satMod val="130000"/>
+                <a:shade val="90000"/>
+                <a:lumMod val="103000"/>
+              </a:schemeClr>
+            </a:gs>
+            <a:gs pos="100000">
+              <a:schemeClr val="phClr">
+                <a:shade val="63000"/>
+                <a:satMod val="120000"/>
+              </a:schemeClr>
+            </a:gs>
+          </a:gsLst>
+          <a:lin ang="5400000" scaled="0"/>
+        </a:gradFill>
+      </a:bgFillStyleLst>
+    </a:fmtScheme>
+  </a:themeElements>
+  <a:objectDefaults>
+    <a:lnDef>
+      <a:spPr/>
+      <a:bodyPr/>
+      <a:lstStyle/>
+      <a:style>
+        <a:lnRef idx="2">
+          <a:schemeClr val="accent1"/>
+        </a:lnRef>
+        <a:fillRef idx="0">
+          <a:schemeClr val="accent1"/>
+        </a:fillRef>
+        <a:effectRef idx="1">
+          <a:schemeClr val="accent1"/>
+        </a:effectRef>
+        <a:fontRef idx="minor">
+          <a:schemeClr val="tx1"/>
+        </a:fontRef>
+      </a:style>
+    </a:lnDef>
+  </a:objectDefaults>
+  <a:extraClrSchemeLst/>
+  <a:extLst>
+    <a:ext uri="{05A4C25C-085E-4340-85A3-A5531E510DB2}">
+      <thm15:themeFamily xmlns:thm15="http://schemas.microsoft.com/office/thememl/2012/main" name="Office Theme" id="{2E142A2C-CD16-42D6-873A-C26D2A0506FA}" vid="{1BDDFF52-6CD6-40A5-AB3C-68EB2F1E4D0A}"/>
+    </a:ext>
+  </a:extLst>
+</a:theme>
 </file>
--- a/HPC final project.pptx
+++ b/HPC final project.pptx
@@ -207,7 +207,7 @@
           <a:p>
             <a:fld id="{8821C431-9A8C-4AAF-B8EF-9280E0C5E213}" type="datetimeFigureOut">
               <a:rPr lang="en-GB" smtClean="0"/>
-              <a:t>28/02/2026</a:t>
+              <a:t>01/03/2026</a:t>
             </a:fld>
             <a:endParaRPr lang="en-GB"/>
           </a:p>
@@ -624,7 +624,7 @@
           <a:p>
             <a:fld id="{203DE63F-52CA-457A-9BA3-B26F08945099}" type="datetimeFigureOut">
               <a:rPr lang="en-GB" smtClean="0"/>
-              <a:t>28/02/2026</a:t>
+              <a:t>01/03/2026</a:t>
             </a:fld>
             <a:endParaRPr lang="en-GB"/>
           </a:p>
@@ -824,7 +824,7 @@
           <a:p>
             <a:fld id="{203DE63F-52CA-457A-9BA3-B26F08945099}" type="datetimeFigureOut">
               <a:rPr lang="en-GB" smtClean="0"/>
-              <a:t>28/02/2026</a:t>
+              <a:t>01/03/2026</a:t>
             </a:fld>
             <a:endParaRPr lang="en-GB"/>
           </a:p>
@@ -1034,7 +1034,7 @@
           <a:p>
             <a:fld id="{203DE63F-52CA-457A-9BA3-B26F08945099}" type="datetimeFigureOut">
               <a:rPr lang="en-GB" smtClean="0"/>
-              <a:t>28/02/2026</a:t>
+              <a:t>01/03/2026</a:t>
             </a:fld>
             <a:endParaRPr lang="en-GB"/>
           </a:p>
@@ -1234,7 +1234,7 @@
           <a:p>
             <a:fld id="{203DE63F-52CA-457A-9BA3-B26F08945099}" type="datetimeFigureOut">
               <a:rPr lang="en-GB" smtClean="0"/>
-              <a:t>28/02/2026</a:t>
+              <a:t>01/03/2026</a:t>
             </a:fld>
             <a:endParaRPr lang="en-GB"/>
           </a:p>
@@ -1510,7 +1510,7 @@
           <a:p>
             <a:fld id="{203DE63F-52CA-457A-9BA3-B26F08945099}" type="datetimeFigureOut">
               <a:rPr lang="en-GB" smtClean="0"/>
-              <a:t>28/02/2026</a:t>
+              <a:t>01/03/2026</a:t>
             </a:fld>
             <a:endParaRPr lang="en-GB"/>
           </a:p>
@@ -1778,7 +1778,7 @@
           <a:p>
             <a:fld id="{203DE63F-52CA-457A-9BA3-B26F08945099}" type="datetimeFigureOut">
               <a:rPr lang="en-GB" smtClean="0"/>
-              <a:t>28/02/2026</a:t>
+              <a:t>01/03/2026</a:t>
             </a:fld>
             <a:endParaRPr lang="en-GB"/>
           </a:p>
@@ -2193,7 +2193,7 @@
           <a:p>
             <a:fld id="{203DE63F-52CA-457A-9BA3-B26F08945099}" type="datetimeFigureOut">
               <a:rPr lang="en-GB" smtClean="0"/>
-              <a:t>28/02/2026</a:t>
+              <a:t>01/03/2026</a:t>
             </a:fld>
             <a:endParaRPr lang="en-GB"/>
           </a:p>
@@ -2335,7 +2335,7 @@
           <a:p>
             <a:fld id="{203DE63F-52CA-457A-9BA3-B26F08945099}" type="datetimeFigureOut">
               <a:rPr lang="en-GB" smtClean="0"/>
-              <a:t>28/02/2026</a:t>
+              <a:t>01/03/2026</a:t>
             </a:fld>
             <a:endParaRPr lang="en-GB"/>
           </a:p>
@@ -2448,7 +2448,7 @@
           <a:p>
             <a:fld id="{203DE63F-52CA-457A-9BA3-B26F08945099}" type="datetimeFigureOut">
               <a:rPr lang="en-GB" smtClean="0"/>
-              <a:t>28/02/2026</a:t>
+              <a:t>01/03/2026</a:t>
             </a:fld>
             <a:endParaRPr lang="en-GB"/>
           </a:p>
@@ -2761,7 +2761,7 @@
           <a:p>
             <a:fld id="{203DE63F-52CA-457A-9BA3-B26F08945099}" type="datetimeFigureOut">
               <a:rPr lang="en-GB" smtClean="0"/>
-              <a:t>28/02/2026</a:t>
+              <a:t>01/03/2026</a:t>
             </a:fld>
             <a:endParaRPr lang="en-GB"/>
           </a:p>
@@ -3050,7 +3050,7 @@
           <a:p>
             <a:fld id="{203DE63F-52CA-457A-9BA3-B26F08945099}" type="datetimeFigureOut">
               <a:rPr lang="en-GB" smtClean="0"/>
-              <a:t>28/02/2026</a:t>
+              <a:t>01/03/2026</a:t>
             </a:fld>
             <a:endParaRPr lang="en-GB"/>
           </a:p>
@@ -3293,7 +3293,7 @@
           <a:p>
             <a:fld id="{203DE63F-52CA-457A-9BA3-B26F08945099}" type="datetimeFigureOut">
               <a:rPr lang="en-GB" smtClean="0"/>
-              <a:t>28/02/2026</a:t>
+              <a:t>01/03/2026</a:t>
             </a:fld>
             <a:endParaRPr lang="en-GB"/>
           </a:p>
@@ -4212,8 +4212,8 @@
           </a:p>
         </p:txBody>
       </p:sp>
-      <mc:AlternateContent xmlns:mc="http://schemas.openxmlformats.org/markup-compatibility/2006">
-        <mc:Choice xmlns:a14="http://schemas.microsoft.com/office/drawing/2010/main" Requires="a14">
+      <mc:AlternateContent xmlns:mc="http://schemas.openxmlformats.org/markup-compatibility/2006" xmlns:a14="http://schemas.microsoft.com/office/drawing/2010/main">
+        <mc:Choice Requires="a14">
           <p:sp>
             <p:nvSpPr>
               <p:cNvPr id="5" name="CasellaDiTesto 4">
@@ -4242,6 +4242,7 @@
               </a:bodyPr>
               <a:lstStyle/>
               <a:p>
+                <a:pPr/>
                 <a14:m>
                   <m:oMathPara xmlns:m="http://schemas.openxmlformats.org/officeDocument/2006/math">
                     <m:oMathParaPr>
@@ -4513,11 +4514,12 @@
                     </m:oMath>
                   </m:oMathPara>
                 </a14:m>
+                <a:endParaRPr/>
               </a:p>
             </p:txBody>
           </p:sp>
         </mc:Choice>
-        <mc:Fallback>
+        <mc:Fallback xmlns="">
           <p:sp>
             <p:nvSpPr>
               <p:cNvPr id="5" name="CasellaDiTesto 4">
@@ -4562,8 +4564,8 @@
           </p:sp>
         </mc:Fallback>
       </mc:AlternateContent>
-      <mc:AlternateContent xmlns:mc="http://schemas.openxmlformats.org/markup-compatibility/2006">
-        <mc:Choice xmlns:a14="http://schemas.microsoft.com/office/drawing/2010/main" Requires="a14">
+      <mc:AlternateContent xmlns:mc="http://schemas.openxmlformats.org/markup-compatibility/2006" xmlns:a14="http://schemas.microsoft.com/office/drawing/2010/main">
+        <mc:Choice Requires="a14">
           <p:sp>
             <p:nvSpPr>
               <p:cNvPr id="6" name="CasellaDiTesto 5">
@@ -4592,6 +4594,7 @@
               </a:bodyPr>
               <a:lstStyle/>
               <a:p>
+                <a:pPr/>
                 <a14:m>
                   <m:oMathPara xmlns:m="http://schemas.openxmlformats.org/officeDocument/2006/math">
                     <m:oMathParaPr>
@@ -4601,7 +4604,7 @@
                       <m:sSubSup>
                         <m:sSubSupPr>
                           <m:ctrlPr>
-                            <a:rPr lang="en-GB" smtClean="0">
+                            <a:rPr lang="en-GB" i="1" smtClean="0">
                               <a:latin typeface="Cambria Math" panose="02040503050406030204" pitchFamily="18" charset="0"/>
                             </a:rPr>
                           </m:ctrlPr>
@@ -5009,6 +5012,7 @@
                     </m:oMath>
                   </m:oMathPara>
                 </a14:m>
+                <a:endParaRPr/>
               </a:p>
               <a:p>
                 <a:endParaRPr lang="en-GB" dirty="0"/>
@@ -5016,7 +5020,7 @@
             </p:txBody>
           </p:sp>
         </mc:Choice>
-        <mc:Fallback>
+        <mc:Fallback xmlns="">
           <p:sp>
             <p:nvSpPr>
               <p:cNvPr id="6" name="CasellaDiTesto 5">
@@ -5089,16 +5093,16 @@
         </p:blipFill>
         <p:spPr>
           <a:xfrm>
-            <a:off x="7534556" y="1579900"/>
-            <a:ext cx="3771007" cy="3771007"/>
+            <a:off x="7534556" y="1688206"/>
+            <a:ext cx="4044000" cy="4044000"/>
           </a:xfrm>
           <a:prstGeom prst="rect">
             <a:avLst/>
           </a:prstGeom>
         </p:spPr>
       </p:pic>
-      <mc:AlternateContent xmlns:mc="http://schemas.openxmlformats.org/markup-compatibility/2006">
-        <mc:Choice xmlns:a14="http://schemas.microsoft.com/office/drawing/2010/main" Requires="a14">
+      <mc:AlternateContent xmlns:mc="http://schemas.openxmlformats.org/markup-compatibility/2006" xmlns:a14="http://schemas.microsoft.com/office/drawing/2010/main">
+        <mc:Choice Requires="a14">
           <p:sp>
             <p:nvSpPr>
               <p:cNvPr id="9" name="CasellaDiTesto 8">
@@ -5403,7 +5407,7 @@
             </p:txBody>
           </p:sp>
         </mc:Choice>
-        <mc:Fallback>
+        <mc:Fallback xmlns="">
           <p:sp>
             <p:nvSpPr>
               <p:cNvPr id="9" name="CasellaDiTesto 8">
@@ -5550,8 +5554,8 @@
         </p:nvSpPr>
         <p:spPr>
           <a:xfrm>
-            <a:off x="7004078" y="5591844"/>
-            <a:ext cx="5338916" cy="1323439"/>
+            <a:off x="7004078" y="5921680"/>
+            <a:ext cx="5338916" cy="1138773"/>
           </a:xfrm>
           <a:prstGeom prst="rect">
             <a:avLst/>
@@ -5565,33 +5569,33 @@
           <a:lstStyle/>
           <a:p>
             <a:r>
-              <a:rPr lang="en-GB" sz="1100" dirty="0"/>
+              <a:rPr lang="en-GB" sz="1000" dirty="0"/>
               <a:t>Picture taken from </a:t>
             </a:r>
             <a:r>
-              <a:rPr lang="en-GB" sz="1100" i="1" dirty="0"/>
+              <a:rPr lang="en-GB" sz="1000" i="1" dirty="0"/>
               <a:t>Sharma, Mittra,  A finite‐difference‐based technique for numerically efficient computation of capacitance matrices for 2‐dimensional multi‐conductor problems involving thin dielectric coating, </a:t>
             </a:r>
             <a:r>
-              <a:rPr lang="en-GB" sz="1100" dirty="0"/>
+              <a:rPr lang="en-GB" sz="1000" dirty="0"/>
               <a:t>June 2024 </a:t>
             </a:r>
             <a:r>
-              <a:rPr lang="en-GB" sz="1100" u="sng" dirty="0">
+              <a:rPr lang="en-GB" sz="1000" u="sng" dirty="0">
                 <a:hlinkClick r:id="rId6"/>
               </a:rPr>
               <a:t>International Journal of Numerical Modelling Electronic Networks Devices and Fields</a:t>
             </a:r>
             <a:r>
-              <a:rPr lang="en-GB" sz="1100" dirty="0"/>
+              <a:rPr lang="en-GB" sz="1000" dirty="0"/>
               <a:t> 37(4)</a:t>
             </a:r>
           </a:p>
           <a:p>
-            <a:endParaRPr lang="en-GB" i="1" dirty="0"/>
-          </a:p>
-          <a:p>
-            <a:endParaRPr lang="en-GB" dirty="0"/>
+            <a:endParaRPr lang="en-GB" sz="1400" i="1" dirty="0"/>
+          </a:p>
+          <a:p>
+            <a:endParaRPr lang="en-GB" sz="1400" dirty="0"/>
           </a:p>
         </p:txBody>
       </p:sp>
@@ -5661,6 +5665,280 @@
           </a:p>
         </p:txBody>
       </p:sp>
+      <p:pic>
+        <p:nvPicPr>
+          <p:cNvPr id="8" name="Immagine 7" descr="Immagine che contiene schermata, testo, quadrato, Rettangolo&#10;&#10;Il contenuto generato dall'IA potrebbe non essere corretto.">
+            <a:extLst>
+              <a:ext uri="{FF2B5EF4-FFF2-40B4-BE49-F238E27FC236}">
+                <a16:creationId xmlns:a16="http://schemas.microsoft.com/office/drawing/2014/main" id="{B7E73B91-37F2-4D6D-2271-0EA826B18ECD}"/>
+              </a:ext>
+            </a:extLst>
+          </p:cNvPr>
+          <p:cNvPicPr>
+            <a:picLocks noChangeAspect="1"/>
+          </p:cNvPicPr>
+          <p:nvPr/>
+        </p:nvPicPr>
+        <p:blipFill>
+          <a:blip r:embed="rId2">
+            <a:extLst>
+              <a:ext uri="{28A0092B-C50C-407E-A947-70E740481C1C}">
+                <a14:useLocalDpi xmlns:a14="http://schemas.microsoft.com/office/drawing/2010/main" val="0"/>
+              </a:ext>
+            </a:extLst>
+          </a:blip>
+          <a:stretch>
+            <a:fillRect/>
+          </a:stretch>
+        </p:blipFill>
+        <p:spPr>
+          <a:xfrm>
+            <a:off x="646603" y="1724112"/>
+            <a:ext cx="3613682" cy="2026436"/>
+          </a:xfrm>
+          <a:prstGeom prst="rect">
+            <a:avLst/>
+          </a:prstGeom>
+        </p:spPr>
+      </p:pic>
+      <p:pic>
+        <p:nvPicPr>
+          <p:cNvPr id="10" name="Immagine 9" descr="Immagine che contiene testo, schermata, quadrato, Rettangolo&#10;&#10;Il contenuto generato dall'IA potrebbe non essere corretto.">
+            <a:extLst>
+              <a:ext uri="{FF2B5EF4-FFF2-40B4-BE49-F238E27FC236}">
+                <a16:creationId xmlns:a16="http://schemas.microsoft.com/office/drawing/2014/main" id="{607E9367-8FBC-3604-4BA3-161A9A78E7C0}"/>
+              </a:ext>
+            </a:extLst>
+          </p:cNvPr>
+          <p:cNvPicPr>
+            <a:picLocks noChangeAspect="1"/>
+          </p:cNvPicPr>
+          <p:nvPr/>
+        </p:nvPicPr>
+        <p:blipFill>
+          <a:blip r:embed="rId3">
+            <a:extLst>
+              <a:ext uri="{28A0092B-C50C-407E-A947-70E740481C1C}">
+                <a14:useLocalDpi xmlns:a14="http://schemas.microsoft.com/office/drawing/2010/main" val="0"/>
+              </a:ext>
+            </a:extLst>
+          </a:blip>
+          <a:stretch>
+            <a:fillRect/>
+          </a:stretch>
+        </p:blipFill>
+        <p:spPr>
+          <a:xfrm>
+            <a:off x="6878348" y="1584142"/>
+            <a:ext cx="5164116" cy="2510927"/>
+          </a:xfrm>
+          <a:prstGeom prst="rect">
+            <a:avLst/>
+          </a:prstGeom>
+        </p:spPr>
+      </p:pic>
+      <p:sp>
+        <p:nvSpPr>
+          <p:cNvPr id="11" name="Freccia a destra 10">
+            <a:extLst>
+              <a:ext uri="{FF2B5EF4-FFF2-40B4-BE49-F238E27FC236}">
+                <a16:creationId xmlns:a16="http://schemas.microsoft.com/office/drawing/2014/main" id="{E4F17179-5284-9CA3-B8CC-B69AB7664A5E}"/>
+              </a:ext>
+            </a:extLst>
+          </p:cNvPr>
+          <p:cNvSpPr/>
+          <p:nvPr/>
+        </p:nvSpPr>
+        <p:spPr>
+          <a:xfrm>
+            <a:off x="4602145" y="2592475"/>
+            <a:ext cx="2276203" cy="461665"/>
+          </a:xfrm>
+          <a:prstGeom prst="rightArrow">
+            <a:avLst/>
+          </a:prstGeom>
+          <a:noFill/>
+        </p:spPr>
+        <p:style>
+          <a:lnRef idx="2">
+            <a:schemeClr val="accent1">
+              <a:shade val="15000"/>
+            </a:schemeClr>
+          </a:lnRef>
+          <a:fillRef idx="1">
+            <a:schemeClr val="accent1"/>
+          </a:fillRef>
+          <a:effectRef idx="0">
+            <a:schemeClr val="accent1"/>
+          </a:effectRef>
+          <a:fontRef idx="minor">
+            <a:schemeClr val="lt1"/>
+          </a:fontRef>
+        </p:style>
+        <p:txBody>
+          <a:bodyPr rtlCol="0" anchor="ctr"/>
+          <a:lstStyle/>
+          <a:p>
+            <a:pPr algn="ctr"/>
+            <a:endParaRPr lang="en-GB"/>
+          </a:p>
+        </p:txBody>
+      </p:sp>
+      <p:sp>
+        <p:nvSpPr>
+          <p:cNvPr id="12" name="CasellaDiTesto 11">
+            <a:extLst>
+              <a:ext uri="{FF2B5EF4-FFF2-40B4-BE49-F238E27FC236}">
+                <a16:creationId xmlns:a16="http://schemas.microsoft.com/office/drawing/2014/main" id="{7BD1B830-F518-DEBD-B1A4-A349F381FFCB}"/>
+              </a:ext>
+            </a:extLst>
+          </p:cNvPr>
+          <p:cNvSpPr txBox="1"/>
+          <p:nvPr/>
+        </p:nvSpPr>
+        <p:spPr>
+          <a:xfrm>
+            <a:off x="381132" y="4899855"/>
+            <a:ext cx="6088494" cy="2031325"/>
+          </a:xfrm>
+          <a:prstGeom prst="rect">
+            <a:avLst/>
+          </a:prstGeom>
+          <a:noFill/>
+        </p:spPr>
+        <p:txBody>
+          <a:bodyPr wrap="square" rtlCol="0">
+            <a:spAutoFit/>
+          </a:bodyPr>
+          <a:lstStyle/>
+          <a:p>
+            <a:pPr marL="285750" indent="-285750">
+              <a:buFont typeface="Arial" panose="020B0604020202020204" pitchFamily="34" charset="0"/>
+              <a:buChar char="•"/>
+            </a:pPr>
+            <a:r>
+              <a:rPr lang="en-GB" dirty="0"/>
+              <a:t>Allocate two planes: OLD and NEW</a:t>
+            </a:r>
+          </a:p>
+          <a:p>
+            <a:pPr marL="285750" indent="-285750">
+              <a:buFont typeface="Arial" panose="020B0604020202020204" pitchFamily="34" charset="0"/>
+              <a:buChar char="•"/>
+            </a:pPr>
+            <a:r>
+              <a:rPr lang="en-GB" dirty="0"/>
+              <a:t>Each plane size: (</a:t>
+            </a:r>
+            <a:r>
+              <a:rPr lang="en-GB" dirty="0" err="1"/>
+              <a:t>mysize</a:t>
+            </a:r>
+            <a:r>
+              <a:rPr lang="en-GB" dirty="0"/>
+              <a:t>[x] + 2) × (</a:t>
+            </a:r>
+            <a:r>
+              <a:rPr lang="en-GB" dirty="0" err="1"/>
+              <a:t>mysize</a:t>
+            </a:r>
+            <a:r>
+              <a:rPr lang="en-GB" dirty="0"/>
+              <a:t>[y] + 2) doubles to account for halo regions</a:t>
+            </a:r>
+          </a:p>
+          <a:p>
+            <a:pPr marL="285750" indent="-285750">
+              <a:buFont typeface="Arial" panose="020B0604020202020204" pitchFamily="34" charset="0"/>
+              <a:buChar char="•"/>
+            </a:pPr>
+            <a:r>
+              <a:rPr lang="en-GB" dirty="0"/>
+              <a:t>Both planes are initialised to zero with </a:t>
+            </a:r>
+            <a:r>
+              <a:rPr lang="en-GB" dirty="0" err="1"/>
+              <a:t>memset</a:t>
+            </a:r>
+            <a:r>
+              <a:rPr lang="en-GB" dirty="0"/>
+              <a:t>()</a:t>
+            </a:r>
+          </a:p>
+          <a:p>
+            <a:pPr marL="285750" indent="-285750">
+              <a:buFont typeface="Arial" panose="020B0604020202020204" pitchFamily="34" charset="0"/>
+              <a:buChar char="•"/>
+            </a:pPr>
+            <a:endParaRPr lang="en-GB" dirty="0"/>
+          </a:p>
+          <a:p>
+            <a:pPr marL="285750" indent="-285750">
+              <a:buFont typeface="Arial" panose="020B0604020202020204" pitchFamily="34" charset="0"/>
+              <a:buChar char="•"/>
+            </a:pPr>
+            <a:endParaRPr lang="en-GB" dirty="0"/>
+          </a:p>
+          <a:p>
+            <a:endParaRPr lang="en-GB" dirty="0"/>
+          </a:p>
+        </p:txBody>
+      </p:sp>
+      <p:sp>
+        <p:nvSpPr>
+          <p:cNvPr id="13" name="CasellaDiTesto 12">
+            <a:extLst>
+              <a:ext uri="{FF2B5EF4-FFF2-40B4-BE49-F238E27FC236}">
+                <a16:creationId xmlns:a16="http://schemas.microsoft.com/office/drawing/2014/main" id="{A6E101FB-2819-CA5B-2F4E-4D15B650DA24}"/>
+              </a:ext>
+            </a:extLst>
+          </p:cNvPr>
+          <p:cNvSpPr txBox="1"/>
+          <p:nvPr/>
+        </p:nvSpPr>
+        <p:spPr>
+          <a:xfrm>
+            <a:off x="6878348" y="4670291"/>
+            <a:ext cx="4745707" cy="1754326"/>
+          </a:xfrm>
+          <a:prstGeom prst="rect">
+            <a:avLst/>
+          </a:prstGeom>
+          <a:noFill/>
+        </p:spPr>
+        <p:txBody>
+          <a:bodyPr wrap="square" rtlCol="0">
+            <a:spAutoFit/>
+          </a:bodyPr>
+          <a:lstStyle/>
+          <a:p>
+            <a:r>
+              <a:rPr lang="en-GB" b="1" dirty="0"/>
+              <a:t>Communicating buffers</a:t>
+            </a:r>
+          </a:p>
+          <a:p>
+            <a:pPr marL="285750" indent="-285750">
+              <a:buFont typeface="Arial" panose="020B0604020202020204" pitchFamily="34" charset="0"/>
+              <a:buChar char="•"/>
+            </a:pPr>
+            <a:r>
+              <a:rPr lang="en-GB" dirty="0"/>
+              <a:t>North/south: no separate buffers allocated, rows contiguous in memory, direct pointers to first/last rows</a:t>
+            </a:r>
+          </a:p>
+          <a:p>
+            <a:pPr marL="285750" indent="-285750">
+              <a:buFont typeface="Arial" panose="020B0604020202020204" pitchFamily="34" charset="0"/>
+              <a:buChar char="•"/>
+            </a:pPr>
+            <a:r>
+              <a:rPr lang="en-GB" dirty="0"/>
+              <a:t>West/east: explicit buffers allocated because columns are non-contiguous</a:t>
+            </a:r>
+          </a:p>
+        </p:txBody>
+      </p:sp>
     </p:spTree>
     <p:extLst>
       <p:ext uri="{BB962C8B-B14F-4D97-AF65-F5344CB8AC3E}">
@@ -5727,6 +6005,110 @@
           </a:p>
         </p:txBody>
       </p:sp>
+      <p:sp>
+        <p:nvSpPr>
+          <p:cNvPr id="4" name="CasellaDiTesto 3">
+            <a:extLst>
+              <a:ext uri="{FF2B5EF4-FFF2-40B4-BE49-F238E27FC236}">
+                <a16:creationId xmlns:a16="http://schemas.microsoft.com/office/drawing/2014/main" id="{7E6240DA-5886-F977-CC7A-2D6CEB7E20C9}"/>
+              </a:ext>
+            </a:extLst>
+          </p:cNvPr>
+          <p:cNvSpPr txBox="1"/>
+          <p:nvPr/>
+        </p:nvSpPr>
+        <p:spPr>
+          <a:xfrm>
+            <a:off x="914400" y="2084439"/>
+            <a:ext cx="8524568" cy="2308324"/>
+          </a:xfrm>
+          <a:prstGeom prst="rect">
+            <a:avLst/>
+          </a:prstGeom>
+          <a:noFill/>
+        </p:spPr>
+        <p:txBody>
+          <a:bodyPr wrap="square" rtlCol="0">
+            <a:spAutoFit/>
+          </a:bodyPr>
+          <a:lstStyle/>
+          <a:p>
+            <a:pPr marL="285750" indent="-285750">
+              <a:buFont typeface="Arial" panose="020B0604020202020204" pitchFamily="34" charset="0"/>
+              <a:buChar char="•"/>
+            </a:pPr>
+            <a:r>
+              <a:rPr lang="en-GB" dirty="0"/>
+              <a:t>Halo regions exchanged using non blocking </a:t>
+            </a:r>
+            <a:r>
+              <a:rPr lang="en-GB" dirty="0" err="1"/>
+              <a:t>MPI_Isend</a:t>
+            </a:r>
+            <a:r>
+              <a:rPr lang="en-GB" dirty="0"/>
+              <a:t>/</a:t>
+            </a:r>
+            <a:r>
+              <a:rPr lang="en-GB" dirty="0" err="1"/>
+              <a:t>MPI_Irecv</a:t>
+            </a:r>
+            <a:endParaRPr lang="en-GB" dirty="0"/>
+          </a:p>
+          <a:p>
+            <a:endParaRPr lang="en-GB" dirty="0"/>
+          </a:p>
+          <a:p>
+            <a:r>
+              <a:rPr lang="en-GB" dirty="0"/>
+              <a:t> Stencil update into two phases:</a:t>
+            </a:r>
+          </a:p>
+          <a:p>
+            <a:pPr marL="285750" indent="-285750">
+              <a:buFont typeface="Arial" panose="020B0604020202020204" pitchFamily="34" charset="0"/>
+              <a:buChar char="•"/>
+            </a:pPr>
+            <a:r>
+              <a:rPr lang="en-GB" dirty="0" err="1"/>
+              <a:t>update_plane_internal</a:t>
+            </a:r>
+            <a:r>
+              <a:rPr lang="en-GB" dirty="0"/>
+              <a:t> updates all grid points not adjacent to boundaries and executes during MPI communication</a:t>
+            </a:r>
+          </a:p>
+          <a:p>
+            <a:pPr marL="285750" indent="-285750">
+              <a:buFont typeface="Arial" panose="020B0604020202020204" pitchFamily="34" charset="0"/>
+              <a:buChar char="•"/>
+            </a:pPr>
+            <a:r>
+              <a:rPr lang="en-GB" dirty="0" err="1"/>
+              <a:t>update_plane_boundary</a:t>
+            </a:r>
+            <a:r>
+              <a:rPr lang="en-GB" dirty="0"/>
+              <a:t> updates only the outer layer of grid points and is executed after halo exchange completes (</a:t>
+            </a:r>
+            <a:r>
+              <a:rPr lang="en-GB" dirty="0" err="1"/>
+              <a:t>MPI_Waitall</a:t>
+            </a:r>
+            <a:r>
+              <a:rPr lang="en-GB" dirty="0"/>
+              <a:t>)</a:t>
+            </a:r>
+          </a:p>
+          <a:p>
+            <a:pPr marL="285750" indent="-285750">
+              <a:buFont typeface="Arial" panose="020B0604020202020204" pitchFamily="34" charset="0"/>
+              <a:buChar char="•"/>
+            </a:pPr>
+            <a:endParaRPr lang="en-GB" dirty="0"/>
+          </a:p>
+        </p:txBody>
+      </p:sp>
     </p:spTree>
     <p:extLst>
       <p:ext uri="{BB962C8B-B14F-4D97-AF65-F5344CB8AC3E}">
@@ -5790,6 +6172,106 @@
               <a:rPr lang="en-GB" sz="2400" dirty="0"/>
               <a:t>OpenMP – parallelization </a:t>
             </a:r>
+          </a:p>
+        </p:txBody>
+      </p:sp>
+      <p:sp>
+        <p:nvSpPr>
+          <p:cNvPr id="3" name="CasellaDiTesto 2">
+            <a:extLst>
+              <a:ext uri="{FF2B5EF4-FFF2-40B4-BE49-F238E27FC236}">
+                <a16:creationId xmlns:a16="http://schemas.microsoft.com/office/drawing/2014/main" id="{3AD0C782-E9E6-D0CB-0F17-414C4A7DDCE9}"/>
+              </a:ext>
+            </a:extLst>
+          </p:cNvPr>
+          <p:cNvSpPr txBox="1"/>
+          <p:nvPr/>
+        </p:nvSpPr>
+        <p:spPr>
+          <a:xfrm>
+            <a:off x="1691148" y="2172929"/>
+            <a:ext cx="8396749" cy="2031325"/>
+          </a:xfrm>
+          <a:prstGeom prst="rect">
+            <a:avLst/>
+          </a:prstGeom>
+          <a:noFill/>
+        </p:spPr>
+        <p:txBody>
+          <a:bodyPr wrap="square" rtlCol="0">
+            <a:spAutoFit/>
+          </a:bodyPr>
+          <a:lstStyle/>
+          <a:p>
+            <a:r>
+              <a:rPr lang="en-GB" dirty="0"/>
+              <a:t>#pragma </a:t>
+            </a:r>
+            <a:r>
+              <a:rPr lang="en-GB" dirty="0" err="1"/>
+              <a:t>omp</a:t>
+            </a:r>
+            <a:r>
+              <a:rPr lang="en-GB" dirty="0"/>
+              <a:t> for schedule(static): static is supposed to be most effective when each iteration brings the same computational work</a:t>
+            </a:r>
+          </a:p>
+          <a:p>
+            <a:endParaRPr lang="en-GB" dirty="0"/>
+          </a:p>
+          <a:p>
+            <a:r>
+              <a:rPr lang="en-GB" dirty="0"/>
+              <a:t>#pragma </a:t>
+            </a:r>
+            <a:r>
+              <a:rPr lang="en-GB" dirty="0" err="1"/>
+              <a:t>omp</a:t>
+            </a:r>
+            <a:r>
+              <a:rPr lang="en-GB" dirty="0"/>
+              <a:t> parallel for collapse(2) reduction(+:</a:t>
+            </a:r>
+            <a:r>
+              <a:rPr lang="en-GB" dirty="0" err="1"/>
+              <a:t>totenergy</a:t>
+            </a:r>
+            <a:r>
+              <a:rPr lang="en-GB" dirty="0"/>
+              <a:t>): </a:t>
+            </a:r>
+          </a:p>
+          <a:p>
+            <a:pPr marL="285750" indent="-285750">
+              <a:buFont typeface="Arial" panose="020B0604020202020204" pitchFamily="34" charset="0"/>
+              <a:buChar char="•"/>
+            </a:pPr>
+            <a:r>
+              <a:rPr lang="en-GB" dirty="0"/>
+              <a:t>collapse enables the parallelization of multiple loops level</a:t>
+            </a:r>
+          </a:p>
+          <a:p>
+            <a:pPr marL="285750" indent="-285750">
+              <a:buFont typeface="Arial" panose="020B0604020202020204" pitchFamily="34" charset="0"/>
+              <a:buChar char="•"/>
+            </a:pPr>
+            <a:r>
+              <a:rPr lang="en-GB" dirty="0"/>
+              <a:t>reduction (+:</a:t>
+            </a:r>
+            <a:r>
+              <a:rPr lang="en-GB" dirty="0" err="1"/>
+              <a:t>totenergy</a:t>
+            </a:r>
+            <a:r>
+              <a:rPr lang="en-GB"/>
+              <a:t>):  </a:t>
+            </a:r>
+            <a:endParaRPr lang="en-GB" dirty="0"/>
+          </a:p>
+          <a:p>
+            <a:endParaRPr lang="en-GB" dirty="0"/>
           </a:p>
         </p:txBody>
       </p:sp>
